--- a/Barrel of Nails — Kessler Study.pptx
+++ b/Barrel of Nails — Kessler Study.pptx
@@ -3494,7 +3494,7 @@
                 <a:ea typeface="IBM Plex Sans" pitchFamily="34" charset="-122"/>
                 <a:cs typeface="IBM Plex Sans" pitchFamily="34" charset="-120"/>
               </a:rPr>
-              <a:t>Secondary persistent zone</a:t>
+              <a:t>Secondary persistent zone — even small fragments stay for centuries to millennia, and it is exactly where several proposed mega-constellations intend to operate.</a:t>
             </a:r>
             <a:r>
               <a:rPr lang="en-US" sz="1450" dirty="0">
@@ -3505,7 +3505,7 @@
                 <a:ea typeface="IBM Plex Sans" pitchFamily="34" charset="-122"/>
                 <a:cs typeface="IBM Plex Sans" pitchFamily="34" charset="-120"/>
               </a:rPr>
-              <a:t> — lifetimes of decades to centuries, and exactly where several proposed mega-constellations intend to operate.</a:t>
+              <a:t/>
             </a:r>
             <a:endParaRPr lang="en-US" sz="1450" dirty="0"/>
           </a:p>
@@ -3583,7 +3583,7 @@
                 <a:ea typeface="IBM Plex Mono" pitchFamily="34" charset="-122"/>
                 <a:cs typeface="IBM Plex Mono" pitchFamily="34" charset="-120"/>
               </a:rPr>
-              <a:t>800–1000 km</a:t>
+              <a:t>700–1,100 km</a:t>
             </a:r>
             <a:endParaRPr lang="en-US" sz="1900" dirty="0"/>
           </a:p>
@@ -3627,7 +3627,7 @@
                 <a:ea typeface="IBM Plex Sans" pitchFamily="34" charset="-122"/>
                 <a:cs typeface="IBM Plex Sans" pitchFamily="34" charset="-120"/>
               </a:rPr>
-              <a:t>The “bad neighborhood.”</a:t>
+              <a:t>The “bad neighborhood.” Fragments last decades to a century, intact objects centuries — and the real debris belt lives here, home to dead giants like Envisat (8 t, 761 km). With no launches at all, its ≥10 cm population still grows ~13% in 50 years.</a:t>
             </a:r>
             <a:r>
               <a:rPr lang="en-US" sz="1500" dirty="0">
@@ -3638,7 +3638,7 @@
                 <a:ea typeface="IBM Plex Sans" pitchFamily="34" charset="-122"/>
                 <a:cs typeface="IBM Plex Sans" pitchFamily="34" charset="-120"/>
               </a:rPr>
-              <a:t> Drag is small and the real debris belt lives here — home to dead giants like </a:t>
+              <a:t/>
             </a:r>
             <a:r>
               <a:rPr lang="en-US" sz="1500" dirty="0">
@@ -3649,7 +3649,7 @@
                 <a:ea typeface="IBM Plex Sans" pitchFamily="34" charset="-122"/>
                 <a:cs typeface="IBM Plex Sans" pitchFamily="34" charset="-120"/>
               </a:rPr>
-              <a:t>Envisat (8 t, at 761 km)</a:t>
+              <a:t/>
             </a:r>
             <a:r>
               <a:rPr lang="en-US" sz="1500" dirty="0">
@@ -3660,7 +3660,7 @@
                 <a:ea typeface="IBM Plex Sans" pitchFamily="34" charset="-122"/>
                 <a:cs typeface="IBM Plex Sans" pitchFamily="34" charset="-120"/>
               </a:rPr>
-              <a:t>. It sits </a:t>
+              <a:t/>
             </a:r>
             <a:r>
               <a:rPr lang="en-US" sz="1500" dirty="0">
@@ -3671,7 +3671,7 @@
                 <a:ea typeface="IBM Plex Sans" pitchFamily="34" charset="-122"/>
                 <a:cs typeface="IBM Plex Sans" pitchFamily="34" charset="-120"/>
               </a:rPr>
-              <a:t>already near-critical</a:t>
+              <a:t/>
             </a:r>
             <a:r>
               <a:rPr lang="en-US" sz="1500" dirty="0">
@@ -3682,7 +3682,7 @@
                 <a:ea typeface="IBM Plex Sans" pitchFamily="34" charset="-122"/>
                 <a:cs typeface="IBM Plex Sans" pitchFamily="34" charset="-120"/>
               </a:rPr>
-              <a:t>, and a barrel lingers for decades (~7× its low-altitude footprint).</a:t>
+              <a:t/>
             </a:r>
             <a:endParaRPr lang="en-US" sz="1500" dirty="0"/>
           </a:p>
@@ -3804,7 +3804,7 @@
                 <a:ea typeface="IBM Plex Sans" pitchFamily="34" charset="-122"/>
                 <a:cs typeface="IBM Plex Sans" pitchFamily="34" charset="-120"/>
               </a:rPr>
-              <a:t>Self-cleaning.</a:t>
+              <a:t>Self-cleaning. Drag clears fragments in months to a few years and dead satellites in about a decade; a barrel at 550 km loses half its nails in 1.5 years.</a:t>
             </a:r>
             <a:r>
               <a:rPr lang="en-US" sz="1450" dirty="0">
@@ -3815,7 +3815,7 @@
                 <a:ea typeface="IBM Plex Sans" pitchFamily="34" charset="-122"/>
                 <a:cs typeface="IBM Plex Sans" pitchFamily="34" charset="-120"/>
               </a:rPr>
-              <a:t> Atmospheric drag clears debris in ~1–2 years. A barrel dumped low is a </a:t>
+              <a:t/>
             </a:r>
             <a:r>
               <a:rPr lang="en-US" sz="1450" dirty="0">
@@ -3826,7 +3826,7 @@
                 <a:ea typeface="IBM Plex Sans" pitchFamily="34" charset="-122"/>
                 <a:cs typeface="IBM Plex Sans" pitchFamily="34" charset="-120"/>
               </a:rPr>
-              <a:t>transient</a:t>
+              <a:t/>
             </a:r>
             <a:r>
               <a:rPr lang="en-US" sz="1450" dirty="0">
@@ -3837,7 +3837,7 @@
                 <a:ea typeface="IBM Plex Sans" pitchFamily="34" charset="-122"/>
                 <a:cs typeface="IBM Plex Sans" pitchFamily="34" charset="-120"/>
               </a:rPr>
-              <a:t> that leaves almost no trace.</a:t>
+              <a:t/>
             </a:r>
             <a:endParaRPr lang="en-US" sz="1450" dirty="0"/>
           </a:p>
@@ -4234,36 +4234,12 @@
                 <a:ea typeface="IBM Plex Sans" pitchFamily="34" charset="-122"/>
                 <a:cs typeface="IBM Plex Sans" pitchFamily="34" charset="-120"/>
               </a:rPr>
-              <a:t>Where an orbit becomes unusable</a:t>
+              <a:t>Where the risk is — and how long it stays</a:t>
             </a:r>
             <a:endParaRPr lang="en-US" sz="2900" dirty="0"/>
           </a:p>
         </p:txBody>
       </p:sp>
-      <p:pic>
-        <p:nvPicPr>
-          <p:cNvPr id="4" name="Picture 3" descr="altitude_persistence.png"/>
-          <p:cNvPicPr>
-            <a:picLocks noChangeAspect="1"/>
-          </p:cNvPicPr>
-          <p:nvPr/>
-        </p:nvPicPr>
-        <p:blipFill>
-          <a:blip r:embed="rId5"/>
-          <a:stretch>
-            <a:fillRect/>
-          </a:stretch>
-        </p:blipFill>
-        <p:spPr>
-          <a:xfrm>
-            <a:off x="812800" y="1507071"/>
-            <a:ext cx="10566400" cy="3556000"/>
-          </a:xfrm>
-          <a:prstGeom prst="rect">
-            <a:avLst/>
-          </a:prstGeom>
-        </p:spPr>
-      </p:pic>
       <p:sp>
         <p:nvSpPr>
           <p:cNvPr id="5" name="TextBox 4"/>
@@ -4309,11 +4285,35 @@
                 </a:solidFill>
                 <a:latin typeface="Calibri"/>
               </a:rPr>
-              <a:t>The 800–1000 km belt is where collisions are most likely and the population is near-critical — it creeps upward on its own over decades. But satellites operate there today: the per-satellite hit rate is far below the ~2%/yr level at which operators abandon a band, and that walk-away line is crossed only under launch-driven runaway (next slide). Orange is the deeper problem: the hazard curve falls off higher up only because that shell is under-populated today, while persistence keeps rising — above ~1000 km drag is negligible, so debris there is effectively permanent, exactly where OneWeb (~1200 km) and proposed mega-constellations are heading.</a:t>
-            </a:r>
-          </a:p>
-        </p:txBody>
-      </p:sp>
+              <a:t>Model output for today's catalog: a satellite in the 700–1,100 km belt runs a ~0.5% a year chance of a lethal hit — well below the ~2%/yr at which operators abandon a band, and satellites fly there now. Orange is the deeper problem: above ~1,000 km fragments stay for centuries and intact objects effectively forever, so whatever breaks there doesn't clear. And one barrel dumped at 550 km briefly makes its shell the most dangerous in LEO (~1.1%/yr, 5× normal).</a:t>
+            </a:r>
+          </a:p>
+        </p:txBody>
+      </p:sp>
+      <p:pic>
+        <p:nvPicPr>
+          <p:cNvPr id="6" name="Picture 5" descr="deck_altitude.png"/>
+          <p:cNvPicPr>
+            <a:picLocks noChangeAspect="1"/>
+          </p:cNvPicPr>
+          <p:nvPr/>
+        </p:nvPicPr>
+        <p:blipFill>
+          <a:blip r:embed="rId6"/>
+          <a:stretch>
+            <a:fillRect/>
+          </a:stretch>
+        </p:blipFill>
+        <p:spPr>
+          <a:xfrm>
+            <a:off x="812800" y="1507071"/>
+            <a:ext cx="10566400" cy="3556000"/>
+          </a:xfrm>
+          <a:prstGeom prst="rect">
+            <a:avLst/>
+          </a:prstGeom>
+        </p:spPr>
+      </p:pic>
     </p:spTree>
   </p:cSld>
   <p:clrMapOvr>
@@ -4435,533 +4435,6 @@
           </a:p>
         </p:txBody>
       </p:sp>
-      <p:pic>
-        <p:nvPicPr>
-          <p:cNvPr id="4" name="Image 0" descr="50-year debris growth versus launch rate; below about 190 per year the belt self-cleans, above it runs away, reaching over 400 times by 2000 per year"/>
-          <p:cNvPicPr>
-            <a:picLocks noChangeAspect="1"/>
-          </p:cNvPicPr>
-          <p:nvPr/>
-        </p:nvPicPr>
-        <p:blipFill>
-          <a:blip r:embed="rId3"/>
-          <a:srcRect t="-17" b="-17"/>
-          <a:stretch/>
-        </p:blipFill>
-        <p:spPr>
-          <a:xfrm>
-            <a:off x="812800" y="1507071"/>
-            <a:ext cx="10566400" cy="3556000"/>
-          </a:xfrm>
-          <a:prstGeom prst="rect">
-            <a:avLst/>
-          </a:prstGeom>
-        </p:spPr>
-      </p:pic>
-      <p:sp>
-        <p:nvSpPr>
-          <p:cNvPr id="5" name="Text 2"/>
-          <p:cNvSpPr/>
-          <p:nvPr/>
-        </p:nvSpPr>
-        <p:spPr>
-          <a:xfrm>
-            <a:off x="812800" y="1545171"/>
-            <a:ext cx="2092960" cy="220927"/>
-          </a:xfrm>
-          <a:prstGeom prst="rect">
-            <a:avLst/>
-          </a:prstGeom>
-          <a:noFill/>
-          <a:ln/>
-        </p:spPr>
-        <p:txBody>
-          <a:bodyPr wrap="square" lIns="0" tIns="0" rIns="0" bIns="0" rtlCol="0" anchor="t">
-            <a:normAutofit/>
-          </a:bodyPr>
-          <a:lstStyle/>
-          <a:p>
-            <a:pPr marL="0" indent="0" algn="l">
-              <a:lnSpc>
-                <a:spcPts val="1540"/>
-              </a:lnSpc>
-              <a:buNone/>
-            </a:pPr>
-            <a:r>
-              <a:rPr lang="en-US" sz="1100" dirty="0">
-                <a:solidFill>
-                  <a:srgbClr val="647A99"/>
-                </a:solidFill>
-                <a:latin typeface="IBM Plex Mono" pitchFamily="34" charset="0"/>
-                <a:ea typeface="IBM Plex Mono" pitchFamily="34" charset="-122"/>
-                <a:cs typeface="IBM Plex Mono" pitchFamily="34" charset="-120"/>
-              </a:rPr>
-              <a:t>50-yr growth ×</a:t>
-            </a:r>
-            <a:endParaRPr lang="en-US" sz="1100" dirty="0"/>
-          </a:p>
-        </p:txBody>
-      </p:sp>
-      <p:sp>
-        <p:nvSpPr>
-          <p:cNvPr id="6" name="Text 3"/>
-          <p:cNvSpPr/>
-          <p:nvPr/>
-        </p:nvSpPr>
-        <p:spPr>
-          <a:xfrm>
-            <a:off x="2717800" y="1926171"/>
-            <a:ext cx="3401060" cy="327620"/>
-          </a:xfrm>
-          <a:prstGeom prst="rect">
-            <a:avLst/>
-          </a:prstGeom>
-          <a:noFill/>
-          <a:ln/>
-        </p:spPr>
-        <p:txBody>
-          <a:bodyPr wrap="square" lIns="0" tIns="0" rIns="0" bIns="0" rtlCol="0" anchor="t">
-            <a:normAutofit/>
-          </a:bodyPr>
-          <a:lstStyle/>
-          <a:p>
-            <a:pPr marL="0" indent="0" algn="l">
-              <a:lnSpc>
-                <a:spcPts val="2380"/>
-              </a:lnSpc>
-              <a:buNone/>
-            </a:pPr>
-            <a:r>
-              <a:rPr lang="en-US" sz="1700" b="1" dirty="0">
-                <a:solidFill>
-                  <a:srgbClr val="FF9AA0"/>
-                </a:solidFill>
-                <a:latin typeface="IBM Plex Sans" pitchFamily="34" charset="0"/>
-                <a:ea typeface="IBM Plex Sans" pitchFamily="34" charset="-122"/>
-                <a:cs typeface="IBM Plex Sans" pitchFamily="34" charset="-120"/>
-              </a:rPr>
-              <a:t>RUNAWAY</a:t>
-            </a:r>
-            <a:endParaRPr lang="en-US" sz="1700" dirty="0"/>
-          </a:p>
-        </p:txBody>
-      </p:sp>
-      <p:sp>
-        <p:nvSpPr>
-          <p:cNvPr id="7" name="Text 4"/>
-          <p:cNvSpPr/>
-          <p:nvPr/>
-        </p:nvSpPr>
-        <p:spPr>
-          <a:xfrm>
-            <a:off x="1765300" y="3507321"/>
-            <a:ext cx="1701800" cy="220927"/>
-          </a:xfrm>
-          <a:prstGeom prst="rect">
-            <a:avLst/>
-          </a:prstGeom>
-          <a:noFill/>
-          <a:ln/>
-        </p:spPr>
-        <p:txBody>
-          <a:bodyPr wrap="square" lIns="0" tIns="0" rIns="0" bIns="0" rtlCol="0" anchor="t">
-            <a:normAutofit/>
-          </a:bodyPr>
-          <a:lstStyle/>
-          <a:p>
-            <a:pPr marL="0" indent="0" algn="l">
-              <a:lnSpc>
-                <a:spcPts val="1540"/>
-              </a:lnSpc>
-              <a:buNone/>
-            </a:pPr>
-            <a:r>
-              <a:rPr lang="en-US" sz="1100" dirty="0">
-                <a:solidFill>
-                  <a:srgbClr val="9FB2CC"/>
-                </a:solidFill>
-                <a:latin typeface="IBM Plex Mono" pitchFamily="34" charset="0"/>
-                <a:ea typeface="IBM Plex Mono" pitchFamily="34" charset="-122"/>
-                <a:cs typeface="IBM Plex Mono" pitchFamily="34" charset="-120"/>
-              </a:rPr>
-              <a:t>×1 — no growth</a:t>
-            </a:r>
-            <a:endParaRPr lang="en-US" sz="1100" dirty="0"/>
-          </a:p>
-        </p:txBody>
-      </p:sp>
-      <p:sp>
-        <p:nvSpPr>
-          <p:cNvPr id="8" name="Text 5"/>
-          <p:cNvSpPr/>
-          <p:nvPr/>
-        </p:nvSpPr>
-        <p:spPr>
-          <a:xfrm>
-            <a:off x="2082800" y="2269071"/>
-            <a:ext cx="1447800" cy="487627"/>
-          </a:xfrm>
-          <a:prstGeom prst="rect">
-            <a:avLst/>
-          </a:prstGeom>
-          <a:noFill/>
-          <a:ln/>
-        </p:spPr>
-        <p:txBody>
-          <a:bodyPr wrap="square" lIns="0" tIns="0" rIns="0" bIns="0" rtlCol="0" anchor="t">
-            <a:normAutofit/>
-          </a:bodyPr>
-          <a:lstStyle/>
-          <a:p>
-            <a:pPr marL="0" indent="0" algn="l">
-              <a:lnSpc>
-                <a:spcPts val="1820"/>
-              </a:lnSpc>
-              <a:buNone/>
-            </a:pPr>
-            <a:r>
-              <a:rPr lang="en-US" sz="1300" dirty="0">
-                <a:solidFill>
-                  <a:srgbClr val="4DA6FF"/>
-                </a:solidFill>
-                <a:latin typeface="IBM Plex Sans" pitchFamily="34" charset="0"/>
-                <a:ea typeface="IBM Plex Sans" pitchFamily="34" charset="-122"/>
-                <a:cs typeface="IBM Plex Sans" pitchFamily="34" charset="-120"/>
-              </a:rPr>
-              <a:t>~190 / yr</a:t>
-            </a:r>
-            <a:endParaRPr lang="en-US" sz="1300" dirty="0"/>
-          </a:p>
-          <a:p>
-            <a:pPr marL="0" indent="0" algn="l">
-              <a:lnSpc>
-                <a:spcPts val="1820"/>
-              </a:lnSpc>
-              <a:buNone/>
-            </a:pPr>
-            <a:r>
-              <a:rPr lang="en-US" sz="1300" dirty="0">
-                <a:solidFill>
-                  <a:srgbClr val="9FB2CC"/>
-                </a:solidFill>
-                <a:latin typeface="IBM Plex Sans" pitchFamily="34" charset="0"/>
-                <a:ea typeface="IBM Plex Sans" pitchFamily="34" charset="-122"/>
-                <a:cs typeface="IBM Plex Sans" pitchFamily="34" charset="-120"/>
-              </a:rPr>
-              <a:t>critical rate</a:t>
-            </a:r>
-            <a:endParaRPr lang="en-US" sz="1300" dirty="0"/>
-          </a:p>
-        </p:txBody>
-      </p:sp>
-      <p:sp>
-        <p:nvSpPr>
-          <p:cNvPr id="9" name="Text 6"/>
-          <p:cNvSpPr/>
-          <p:nvPr/>
-        </p:nvSpPr>
-        <p:spPr>
-          <a:xfrm>
-            <a:off x="9448800" y="2116671"/>
-            <a:ext cx="1447800" cy="256514"/>
-          </a:xfrm>
-          <a:prstGeom prst="rect">
-            <a:avLst/>
-          </a:prstGeom>
-          <a:noFill/>
-          <a:ln/>
-        </p:spPr>
-        <p:txBody>
-          <a:bodyPr wrap="square" lIns="0" tIns="0" rIns="0" bIns="0" rtlCol="0" anchor="t">
-            <a:normAutofit/>
-          </a:bodyPr>
-          <a:lstStyle/>
-          <a:p>
-            <a:pPr marL="0" indent="0" algn="l">
-              <a:lnSpc>
-                <a:spcPts val="1820"/>
-              </a:lnSpc>
-              <a:buNone/>
-            </a:pPr>
-            <a:r>
-              <a:rPr lang="en-US" sz="1300" dirty="0">
-                <a:solidFill>
-                  <a:srgbClr val="FF5A52"/>
-                </a:solidFill>
-                <a:latin typeface="IBM Plex Sans" pitchFamily="34" charset="0"/>
-                <a:ea typeface="IBM Plex Sans" pitchFamily="34" charset="-122"/>
-                <a:cs typeface="IBM Plex Sans" pitchFamily="34" charset="-120"/>
-              </a:rPr>
-              <a:t>×421 at 2000/yr</a:t>
-            </a:r>
-            <a:endParaRPr lang="en-US" sz="1300" dirty="0"/>
-          </a:p>
-        </p:txBody>
-      </p:sp>
-      <p:sp>
-        <p:nvSpPr>
-          <p:cNvPr id="10" name="Text 7"/>
-          <p:cNvSpPr/>
-          <p:nvPr/>
-        </p:nvSpPr>
-        <p:spPr>
-          <a:xfrm>
-            <a:off x="1651000" y="4593171"/>
-            <a:ext cx="134673" cy="220927"/>
-          </a:xfrm>
-          <a:prstGeom prst="rect">
-            <a:avLst/>
-          </a:prstGeom>
-          <a:noFill/>
-          <a:ln/>
-        </p:spPr>
-        <p:txBody>
-          <a:bodyPr wrap="square" lIns="0" tIns="0" rIns="0" bIns="0" rtlCol="0" anchor="t">
-            <a:normAutofit/>
-          </a:bodyPr>
-          <a:lstStyle/>
-          <a:p>
-            <a:pPr marL="0" indent="0" algn="l">
-              <a:lnSpc>
-                <a:spcPts val="1540"/>
-              </a:lnSpc>
-              <a:buNone/>
-            </a:pPr>
-            <a:r>
-              <a:rPr lang="en-US" sz="1100" dirty="0">
-                <a:solidFill>
-                  <a:srgbClr val="647A99"/>
-                </a:solidFill>
-                <a:latin typeface="IBM Plex Mono" pitchFamily="34" charset="0"/>
-                <a:ea typeface="IBM Plex Mono" pitchFamily="34" charset="-122"/>
-                <a:cs typeface="IBM Plex Mono" pitchFamily="34" charset="-120"/>
-              </a:rPr>
-              <a:t>0</a:t>
-            </a:r>
-            <a:endParaRPr lang="en-US" sz="1100" dirty="0"/>
-          </a:p>
-        </p:txBody>
-      </p:sp>
-      <p:sp>
-        <p:nvSpPr>
-          <p:cNvPr id="11" name="Text 8"/>
-          <p:cNvSpPr/>
-          <p:nvPr/>
-        </p:nvSpPr>
-        <p:spPr>
-          <a:xfrm>
-            <a:off x="3797300" y="4593171"/>
-            <a:ext cx="302286" cy="220927"/>
-          </a:xfrm>
-          <a:prstGeom prst="rect">
-            <a:avLst/>
-          </a:prstGeom>
-          <a:noFill/>
-          <a:ln/>
-        </p:spPr>
-        <p:txBody>
-          <a:bodyPr wrap="square" lIns="0" tIns="0" rIns="0" bIns="0" rtlCol="0" anchor="t">
-            <a:normAutofit/>
-          </a:bodyPr>
-          <a:lstStyle/>
-          <a:p>
-            <a:pPr marL="0" indent="0" algn="l">
-              <a:lnSpc>
-                <a:spcPts val="1540"/>
-              </a:lnSpc>
-              <a:buNone/>
-            </a:pPr>
-            <a:r>
-              <a:rPr lang="en-US" sz="1100" dirty="0">
-                <a:solidFill>
-                  <a:srgbClr val="647A99"/>
-                </a:solidFill>
-                <a:latin typeface="IBM Plex Mono" pitchFamily="34" charset="0"/>
-                <a:ea typeface="IBM Plex Mono" pitchFamily="34" charset="-122"/>
-                <a:cs typeface="IBM Plex Mono" pitchFamily="34" charset="-120"/>
-              </a:rPr>
-              <a:t>500</a:t>
-            </a:r>
-            <a:endParaRPr lang="en-US" sz="1100" dirty="0"/>
-          </a:p>
-        </p:txBody>
-      </p:sp>
-      <p:sp>
-        <p:nvSpPr>
-          <p:cNvPr id="12" name="Text 9"/>
-          <p:cNvSpPr/>
-          <p:nvPr/>
-        </p:nvSpPr>
-        <p:spPr>
-          <a:xfrm>
-            <a:off x="6070600" y="4593171"/>
-            <a:ext cx="386093" cy="220927"/>
-          </a:xfrm>
-          <a:prstGeom prst="rect">
-            <a:avLst/>
-          </a:prstGeom>
-          <a:noFill/>
-          <a:ln/>
-        </p:spPr>
-        <p:txBody>
-          <a:bodyPr wrap="square" lIns="0" tIns="0" rIns="0" bIns="0" rtlCol="0" anchor="t">
-            <a:normAutofit/>
-          </a:bodyPr>
-          <a:lstStyle/>
-          <a:p>
-            <a:pPr marL="0" indent="0" algn="l">
-              <a:lnSpc>
-                <a:spcPts val="1540"/>
-              </a:lnSpc>
-              <a:buNone/>
-            </a:pPr>
-            <a:r>
-              <a:rPr lang="en-US" sz="1100" dirty="0">
-                <a:solidFill>
-                  <a:srgbClr val="647A99"/>
-                </a:solidFill>
-                <a:latin typeface="IBM Plex Mono" pitchFamily="34" charset="0"/>
-                <a:ea typeface="IBM Plex Mono" pitchFamily="34" charset="-122"/>
-                <a:cs typeface="IBM Plex Mono" pitchFamily="34" charset="-120"/>
-              </a:rPr>
-              <a:t>1000</a:t>
-            </a:r>
-            <a:endParaRPr lang="en-US" sz="1100" dirty="0"/>
-          </a:p>
-        </p:txBody>
-      </p:sp>
-      <p:sp>
-        <p:nvSpPr>
-          <p:cNvPr id="13" name="Text 10"/>
-          <p:cNvSpPr/>
-          <p:nvPr/>
-        </p:nvSpPr>
-        <p:spPr>
-          <a:xfrm>
-            <a:off x="8356600" y="4593171"/>
-            <a:ext cx="386093" cy="220927"/>
-          </a:xfrm>
-          <a:prstGeom prst="rect">
-            <a:avLst/>
-          </a:prstGeom>
-          <a:noFill/>
-          <a:ln/>
-        </p:spPr>
-        <p:txBody>
-          <a:bodyPr wrap="square" lIns="0" tIns="0" rIns="0" bIns="0" rtlCol="0" anchor="t">
-            <a:normAutofit/>
-          </a:bodyPr>
-          <a:lstStyle/>
-          <a:p>
-            <a:pPr marL="0" indent="0" algn="l">
-              <a:lnSpc>
-                <a:spcPts val="1540"/>
-              </a:lnSpc>
-              <a:buNone/>
-            </a:pPr>
-            <a:r>
-              <a:rPr lang="en-US" sz="1100" dirty="0">
-                <a:solidFill>
-                  <a:srgbClr val="647A99"/>
-                </a:solidFill>
-                <a:latin typeface="IBM Plex Mono" pitchFamily="34" charset="0"/>
-                <a:ea typeface="IBM Plex Mono" pitchFamily="34" charset="-122"/>
-                <a:cs typeface="IBM Plex Mono" pitchFamily="34" charset="-120"/>
-              </a:rPr>
-              <a:t>1500</a:t>
-            </a:r>
-            <a:endParaRPr lang="en-US" sz="1100" dirty="0"/>
-          </a:p>
-        </p:txBody>
-      </p:sp>
-      <p:sp>
-        <p:nvSpPr>
-          <p:cNvPr id="14" name="Text 11"/>
-          <p:cNvSpPr/>
-          <p:nvPr/>
-        </p:nvSpPr>
-        <p:spPr>
-          <a:xfrm>
-            <a:off x="10642600" y="4593171"/>
-            <a:ext cx="386093" cy="220927"/>
-          </a:xfrm>
-          <a:prstGeom prst="rect">
-            <a:avLst/>
-          </a:prstGeom>
-          <a:noFill/>
-          <a:ln/>
-        </p:spPr>
-        <p:txBody>
-          <a:bodyPr wrap="square" lIns="0" tIns="0" rIns="0" bIns="0" rtlCol="0" anchor="t">
-            <a:normAutofit/>
-          </a:bodyPr>
-          <a:lstStyle/>
-          <a:p>
-            <a:pPr marL="0" indent="0" algn="l">
-              <a:lnSpc>
-                <a:spcPts val="1540"/>
-              </a:lnSpc>
-              <a:buNone/>
-            </a:pPr>
-            <a:r>
-              <a:rPr lang="en-US" sz="1100" dirty="0">
-                <a:solidFill>
-                  <a:srgbClr val="647A99"/>
-                </a:solidFill>
-                <a:latin typeface="IBM Plex Mono" pitchFamily="34" charset="0"/>
-                <a:ea typeface="IBM Plex Mono" pitchFamily="34" charset="-122"/>
-                <a:cs typeface="IBM Plex Mono" pitchFamily="34" charset="-120"/>
-              </a:rPr>
-              <a:t>2000</a:t>
-            </a:r>
-            <a:endParaRPr lang="en-US" sz="1100" dirty="0"/>
-          </a:p>
-        </p:txBody>
-      </p:sp>
-      <p:sp>
-        <p:nvSpPr>
-          <p:cNvPr id="15" name="Text 12"/>
-          <p:cNvSpPr/>
-          <p:nvPr/>
-        </p:nvSpPr>
-        <p:spPr>
-          <a:xfrm>
-            <a:off x="4876800" y="4834471"/>
-            <a:ext cx="3068857" cy="229857"/>
-          </a:xfrm>
-          <a:prstGeom prst="rect">
-            <a:avLst/>
-          </a:prstGeom>
-          <a:noFill/>
-          <a:ln/>
-        </p:spPr>
-        <p:txBody>
-          <a:bodyPr wrap="square" lIns="0" tIns="0" rIns="0" bIns="0" rtlCol="0" anchor="t">
-            <a:normAutofit/>
-          </a:bodyPr>
-          <a:lstStyle/>
-          <a:p>
-            <a:pPr marL="0" indent="0" algn="l">
-              <a:lnSpc>
-                <a:spcPts val="1610"/>
-              </a:lnSpc>
-              <a:buNone/>
-            </a:pPr>
-            <a:r>
-              <a:rPr lang="en-US" sz="1150" dirty="0">
-                <a:solidFill>
-                  <a:srgbClr val="9FB2CC"/>
-                </a:solidFill>
-                <a:latin typeface="IBM Plex Mono" pitchFamily="34" charset="0"/>
-                <a:ea typeface="IBM Plex Mono" pitchFamily="34" charset="-122"/>
-                <a:cs typeface="IBM Plex Mono" pitchFamily="34" charset="-120"/>
-              </a:rPr>
-              <a:t>launches / yr into the 900 km band</a:t>
-            </a:r>
-            <a:endParaRPr lang="en-US" sz="1150" dirty="0"/>
-          </a:p>
-        </p:txBody>
-      </p:sp>
       <p:sp>
         <p:nvSpPr>
           <p:cNvPr id="16" name="TextBox 15"/>
@@ -5016,11 +4489,35 @@
                 </a:solidFill>
                 <a:latin typeface="Calibri"/>
               </a:rPr>
-              <a:t>Collisions breed fragments faster than atmospheric drag can remove them, so more debris drives more collisions — a self-feeding cascade (Kessler syndrome). Below the critical rate (~190/yr) the belt self-cleans and 50-year growth holds at ×1; above it, growth runs away. The ×421 figure assumes all 2,000 launches/yr go into the single 900 km belt — a deliberate worst-case, not a realistic global traffic split. The driver is sustained launch traffic over decades, not any one object — a barrel of nails is nowhere on this axis.</a:t>
-            </a:r>
-          </a:p>
-        </p:txBody>
-      </p:sp>
+              <a:t>Collisions breed fragments faster than drag can remove them, so more debris drives more collisions — a self-feeding cascade (Kessler syndrome). The 700–1,100 km belt is already there: with no launches at all its ≥10 cm population grows ~13% in 50 years. Every launch into it steepens that: 50/yr multiplies it ×2.5, 200/yr ×16. These figures put every launch into the single 900 km belt — a deliberate stress test, not a realistic traffic split. A barrel of nails is nowhere on this axis.</a:t>
+            </a:r>
+          </a:p>
+        </p:txBody>
+      </p:sp>
+      <p:pic>
+        <p:nvPicPr>
+          <p:cNvPr id="17" name="Picture 16" descr="deck_tipping.png"/>
+          <p:cNvPicPr>
+            <a:picLocks noChangeAspect="1"/>
+          </p:cNvPicPr>
+          <p:nvPr/>
+        </p:nvPicPr>
+        <p:blipFill>
+          <a:blip r:embed="rId4"/>
+          <a:stretch>
+            <a:fillRect/>
+          </a:stretch>
+        </p:blipFill>
+        <p:spPr>
+          <a:xfrm>
+            <a:off x="812800" y="1507071"/>
+            <a:ext cx="10566400" cy="3556000"/>
+          </a:xfrm>
+          <a:prstGeom prst="rect">
+            <a:avLst/>
+          </a:prstGeom>
+        </p:spPr>
+      </p:pic>
     </p:spTree>
   </p:cSld>
   <p:clrMapOvr>
@@ -5136,332 +4633,9 @@
                 <a:ea typeface="IBM Plex Sans" pitchFamily="34" charset="-122"/>
                 <a:cs typeface="IBM Plex Sans" pitchFamily="34" charset="-120"/>
               </a:rPr>
-              <a:t>The runaway is self-limiting</a:t>
+              <a:t>Operators quit — the cascade doesn't</a:t>
             </a:r>
             <a:endParaRPr lang="en-US" sz="3000" dirty="0"/>
-          </a:p>
-        </p:txBody>
-      </p:sp>
-      <p:sp>
-        <p:nvSpPr>
-          <p:cNvPr id="4" name="Shape 2"/>
-          <p:cNvSpPr/>
-          <p:nvPr/>
-        </p:nvSpPr>
-        <p:spPr>
-          <a:xfrm>
-            <a:off x="815975" y="2223430"/>
-            <a:ext cx="5149850" cy="2414984"/>
-          </a:xfrm>
-          <a:prstGeom prst="roundRect">
-            <a:avLst>
-              <a:gd name="adj" fmla="val 4076"/>
-            </a:avLst>
-          </a:prstGeom>
-          <a:solidFill>
-            <a:srgbClr val="06080E"/>
-          </a:solidFill>
-          <a:ln w="6350">
-            <a:solidFill>
-              <a:srgbClr val="2A3A52"/>
-            </a:solidFill>
-            <a:prstDash val="solid"/>
-          </a:ln>
-        </p:spPr>
-        <p:txBody>
-          <a:bodyPr/>
-          <a:lstStyle/>
-          <a:p>
-            <a:endParaRPr lang="en-CH"/>
-          </a:p>
-        </p:txBody>
-      </p:sp>
-      <p:sp>
-        <p:nvSpPr>
-          <p:cNvPr id="5" name="Text 3"/>
-          <p:cNvSpPr/>
-          <p:nvPr/>
-        </p:nvSpPr>
-        <p:spPr>
-          <a:xfrm>
-            <a:off x="1071033" y="2478484"/>
-            <a:ext cx="4778925" cy="269214"/>
-          </a:xfrm>
-          <a:prstGeom prst="rect">
-            <a:avLst/>
-          </a:prstGeom>
-          <a:noFill/>
-          <a:ln/>
-        </p:spPr>
-        <p:txBody>
-          <a:bodyPr wrap="square" lIns="0" tIns="0" rIns="0" bIns="0" rtlCol="0" anchor="t">
-            <a:normAutofit/>
-          </a:bodyPr>
-          <a:lstStyle/>
-          <a:p>
-            <a:pPr marL="0" indent="0" algn="l">
-              <a:lnSpc>
-                <a:spcPts val="1920"/>
-              </a:lnSpc>
-              <a:buNone/>
-            </a:pPr>
-            <a:r>
-              <a:rPr lang="en-US" sz="1600" b="1" dirty="0">
-                <a:solidFill>
-                  <a:srgbClr val="FF5A52"/>
-                </a:solidFill>
-                <a:latin typeface="IBM Plex Sans" pitchFamily="34" charset="0"/>
-                <a:ea typeface="IBM Plex Sans" pitchFamily="34" charset="-122"/>
-                <a:cs typeface="IBM Plex Sans" pitchFamily="34" charset="-120"/>
-              </a:rPr>
-              <a:t>Constant launch</a:t>
-            </a:r>
-            <a:endParaRPr lang="en-US" sz="1600" dirty="0"/>
-          </a:p>
-        </p:txBody>
-      </p:sp>
-      <p:pic>
-        <p:nvPicPr>
-          <p:cNvPr id="6" name="Image 0" descr="Rising exponential curve"/>
-          <p:cNvPicPr>
-            <a:picLocks noChangeAspect="1"/>
-          </p:cNvPicPr>
-          <p:nvPr/>
-        </p:nvPicPr>
-        <p:blipFill>
-          <a:blip r:embed="rId3"/>
-          <a:srcRect/>
-          <a:stretch/>
-        </p:blipFill>
-        <p:spPr>
-          <a:xfrm>
-            <a:off x="1071033" y="2836602"/>
-            <a:ext cx="2794000" cy="952500"/>
-          </a:xfrm>
-          <a:prstGeom prst="rect">
-            <a:avLst/>
-          </a:prstGeom>
-        </p:spPr>
-      </p:pic>
-      <p:sp>
-        <p:nvSpPr>
-          <p:cNvPr id="7" name="Text 4"/>
-          <p:cNvSpPr/>
-          <p:nvPr/>
-        </p:nvSpPr>
-        <p:spPr>
-          <a:xfrm>
-            <a:off x="1071033" y="3903402"/>
-            <a:ext cx="4778925" cy="505354"/>
-          </a:xfrm>
-          <a:prstGeom prst="rect">
-            <a:avLst/>
-          </a:prstGeom>
-          <a:noFill/>
-          <a:ln/>
-        </p:spPr>
-        <p:txBody>
-          <a:bodyPr wrap="square" lIns="0" tIns="0" rIns="0" bIns="0" rtlCol="0" anchor="t">
-            <a:normAutofit/>
-          </a:bodyPr>
-          <a:lstStyle/>
-          <a:p>
-            <a:pPr marL="0" indent="0" algn="l">
-              <a:lnSpc>
-                <a:spcPts val="1890"/>
-              </a:lnSpc>
-              <a:buNone/>
-            </a:pPr>
-            <a:r>
-              <a:rPr lang="en-US" sz="1400" b="1" dirty="0">
-                <a:solidFill>
-                  <a:srgbClr val="9FB2CC"/>
-                </a:solidFill>
-                <a:latin typeface="IBM Plex Sans" pitchFamily="34" charset="0"/>
-                <a:ea typeface="IBM Plex Sans" pitchFamily="34" charset="-122"/>
-                <a:cs typeface="IBM Plex Sans" pitchFamily="34" charset="-120"/>
-              </a:rPr>
-              <a:t>8.8M objects</a:t>
-            </a:r>
-            <a:r>
-              <a:rPr lang="en-US" sz="1400" dirty="0">
-                <a:solidFill>
-                  <a:srgbClr val="9FB2CC"/>
-                </a:solidFill>
-                <a:latin typeface="IBM Plex Sans" pitchFamily="34" charset="0"/>
-                <a:ea typeface="IBM Plex Sans" pitchFamily="34" charset="-122"/>
-                <a:cs typeface="IBM Plex Sans" pitchFamily="34" charset="-120"/>
-              </a:rPr>
-              <a:t> by year 50 — an unphysical, unbounded pile-up.</a:t>
-            </a:r>
-            <a:endParaRPr lang="en-US" sz="1400" dirty="0"/>
-          </a:p>
-        </p:txBody>
-      </p:sp>
-      <p:sp>
-        <p:nvSpPr>
-          <p:cNvPr id="8" name="Shape 5"/>
-          <p:cNvSpPr/>
-          <p:nvPr/>
-        </p:nvSpPr>
-        <p:spPr>
-          <a:xfrm>
-            <a:off x="6226175" y="2223430"/>
-            <a:ext cx="5149850" cy="2414984"/>
-          </a:xfrm>
-          <a:prstGeom prst="roundRect">
-            <a:avLst>
-              <a:gd name="adj" fmla="val 4076"/>
-            </a:avLst>
-          </a:prstGeom>
-          <a:solidFill>
-            <a:srgbClr val="06080E"/>
-          </a:solidFill>
-          <a:ln w="6350">
-            <a:solidFill>
-              <a:srgbClr val="2A3A52"/>
-            </a:solidFill>
-            <a:prstDash val="solid"/>
-          </a:ln>
-        </p:spPr>
-        <p:txBody>
-          <a:bodyPr/>
-          <a:lstStyle/>
-          <a:p>
-            <a:endParaRPr lang="en-CH"/>
-          </a:p>
-        </p:txBody>
-      </p:sp>
-      <p:sp>
-        <p:nvSpPr>
-          <p:cNvPr id="9" name="Text 6"/>
-          <p:cNvSpPr/>
-          <p:nvPr/>
-        </p:nvSpPr>
-        <p:spPr>
-          <a:xfrm>
-            <a:off x="6481233" y="2478484"/>
-            <a:ext cx="4778925" cy="269214"/>
-          </a:xfrm>
-          <a:prstGeom prst="rect">
-            <a:avLst/>
-          </a:prstGeom>
-          <a:noFill/>
-          <a:ln/>
-        </p:spPr>
-        <p:txBody>
-          <a:bodyPr wrap="square" lIns="0" tIns="0" rIns="0" bIns="0" rtlCol="0" anchor="t">
-            <a:normAutofit/>
-          </a:bodyPr>
-          <a:lstStyle/>
-          <a:p>
-            <a:pPr marL="0" indent="0" algn="l">
-              <a:lnSpc>
-                <a:spcPts val="1920"/>
-              </a:lnSpc>
-              <a:buNone/>
-            </a:pPr>
-            <a:r>
-              <a:rPr lang="en-US" sz="1600" b="1" dirty="0">
-                <a:solidFill>
-                  <a:srgbClr val="39D98A"/>
-                </a:solidFill>
-                <a:latin typeface="IBM Plex Sans" pitchFamily="34" charset="0"/>
-                <a:ea typeface="IBM Plex Sans" pitchFamily="34" charset="-122"/>
-                <a:cs typeface="IBM Plex Sans" pitchFamily="34" charset="-120"/>
-              </a:rPr>
-              <a:t>Responsive launch</a:t>
-            </a:r>
-            <a:endParaRPr lang="en-US" sz="1600" dirty="0"/>
-          </a:p>
-        </p:txBody>
-      </p:sp>
-      <p:pic>
-        <p:nvPicPr>
-          <p:cNvPr id="10" name="Image 1" descr="Curve that rises then plateaus"/>
-          <p:cNvPicPr>
-            <a:picLocks noChangeAspect="1"/>
-          </p:cNvPicPr>
-          <p:nvPr/>
-        </p:nvPicPr>
-        <p:blipFill>
-          <a:blip r:embed="rId4"/>
-          <a:srcRect/>
-          <a:stretch/>
-        </p:blipFill>
-        <p:spPr>
-          <a:xfrm>
-            <a:off x="6481233" y="2836602"/>
-            <a:ext cx="2794000" cy="952500"/>
-          </a:xfrm>
-          <a:prstGeom prst="rect">
-            <a:avLst/>
-          </a:prstGeom>
-        </p:spPr>
-      </p:pic>
-      <p:sp>
-        <p:nvSpPr>
-          <p:cNvPr id="11" name="Text 7"/>
-          <p:cNvSpPr/>
-          <p:nvPr/>
-        </p:nvSpPr>
-        <p:spPr>
-          <a:xfrm>
-            <a:off x="6481233" y="3903402"/>
-            <a:ext cx="4778925" cy="505354"/>
-          </a:xfrm>
-          <a:prstGeom prst="rect">
-            <a:avLst/>
-          </a:prstGeom>
-          <a:noFill/>
-          <a:ln/>
-        </p:spPr>
-        <p:txBody>
-          <a:bodyPr wrap="square" lIns="0" tIns="0" rIns="0" bIns="0" rtlCol="0" anchor="t">
-            <a:normAutofit/>
-          </a:bodyPr>
-          <a:lstStyle/>
-          <a:p>
-            <a:pPr marL="0" indent="0" algn="l">
-              <a:lnSpc>
-                <a:spcPts val="1890"/>
-              </a:lnSpc>
-              <a:buNone/>
-            </a:pPr>
-            <a:r>
-              <a:rPr lang="en-US" sz="1400" dirty="0">
-                <a:solidFill>
-                  <a:srgbClr val="9FB2CC"/>
-                </a:solidFill>
-                <a:latin typeface="IBM Plex Sans" pitchFamily="34" charset="0"/>
-                <a:ea typeface="IBM Plex Sans" pitchFamily="34" charset="-122"/>
-                <a:cs typeface="IBM Plex Sans" pitchFamily="34" charset="-120"/>
-              </a:rPr>
-              <a:t>Operators quit above ~2%/yr attrition → capped at </a:t>
-            </a:r>
-            <a:r>
-              <a:rPr lang="en-US" sz="1400" b="1" dirty="0">
-                <a:solidFill>
-                  <a:srgbClr val="9FB2CC"/>
-                </a:solidFill>
-                <a:latin typeface="IBM Plex Sans" pitchFamily="34" charset="0"/>
-                <a:ea typeface="IBM Plex Sans" pitchFamily="34" charset="-122"/>
-                <a:cs typeface="IBM Plex Sans" pitchFamily="34" charset="-120"/>
-              </a:rPr>
-              <a:t>1.7M</a:t>
-            </a:r>
-            <a:r>
-              <a:rPr lang="en-US" sz="1400" dirty="0">
-                <a:solidFill>
-                  <a:srgbClr val="9FB2CC"/>
-                </a:solidFill>
-                <a:latin typeface="IBM Plex Sans" pitchFamily="34" charset="0"/>
-                <a:ea typeface="IBM Plex Sans" pitchFamily="34" charset="-122"/>
-                <a:cs typeface="IBM Plex Sans" pitchFamily="34" charset="-120"/>
-              </a:rPr>
-              <a:t>. The band is abandoned, not filled.</a:t>
-            </a:r>
-            <a:endParaRPr lang="en-US" sz="1400" dirty="0"/>
           </a:p>
         </p:txBody>
       </p:sp>
@@ -5503,7 +4677,7 @@
                 <a:ea typeface="IBM Plex Sans" pitchFamily="34" charset="-122"/>
                 <a:cs typeface="IBM Plex Sans" pitchFamily="34" charset="-120"/>
               </a:rPr>
-              <a:t>with rational operators, a barrel isn't a debris-</a:t>
+              <a:t>At 500 launches a year into the belt, operators throttle back as the risk rises and stop entirely by year ~28 — yet the belt's ≥10 cm population still grows ×2.0 afterwards. Abandoning a band doesn't save it once the cascade runs.</a:t>
             </a:r>
             <a:r>
               <a:rPr lang="en-US" sz="1550" i="1" dirty="0">
@@ -5514,7 +4688,7 @@
                 <a:ea typeface="IBM Plex Sans" pitchFamily="34" charset="-122"/>
                 <a:cs typeface="IBM Plex Sans" pitchFamily="34" charset="-120"/>
               </a:rPr>
-              <a:t>adder</a:t>
+              <a:t/>
             </a:r>
             <a:r>
               <a:rPr lang="en-US" sz="1550" dirty="0">
@@ -5525,7 +4699,7 @@
                 <a:ea typeface="IBM Plex Sans" pitchFamily="34" charset="-122"/>
                 <a:cs typeface="IBM Plex Sans" pitchFamily="34" charset="-120"/>
               </a:rPr>
-              <a:t> — it's a </a:t>
+              <a:t/>
             </a:r>
             <a:r>
               <a:rPr lang="en-US" sz="1550" dirty="0">
@@ -5536,7 +4710,7 @@
                 <a:ea typeface="IBM Plex Sans" pitchFamily="34" charset="-122"/>
                 <a:cs typeface="IBM Plex Sans" pitchFamily="34" charset="-120"/>
               </a:rPr>
-              <a:t>band-denial weapon</a:t>
+              <a:t/>
             </a:r>
             <a:r>
               <a:rPr lang="en-US" sz="1550" dirty="0">
@@ -5547,12 +4721,36 @@
                 <a:ea typeface="IBM Plex Sans" pitchFamily="34" charset="-122"/>
                 <a:cs typeface="IBM Plex Sans" pitchFamily="34" charset="-120"/>
               </a:rPr>
-              <a:t>, driving operators out of a valuable shell sooner.</a:t>
+              <a:t/>
             </a:r>
             <a:endParaRPr lang="en-US" sz="1550" dirty="0"/>
           </a:p>
         </p:txBody>
       </p:sp>
+      <p:pic>
+        <p:nvPicPr>
+          <p:cNvPr id="13" name="Picture 12" descr="deck_responsive.png"/>
+          <p:cNvPicPr>
+            <a:picLocks noChangeAspect="1"/>
+          </p:cNvPicPr>
+          <p:nvPr/>
+        </p:nvPicPr>
+        <p:blipFill>
+          <a:blip r:embed="rId5"/>
+          <a:stretch>
+            <a:fillRect/>
+          </a:stretch>
+        </p:blipFill>
+        <p:spPr>
+          <a:xfrm>
+            <a:off x="1069848" y="1691640"/>
+            <a:ext cx="10058400" cy="3429000"/>
+          </a:xfrm>
+          <a:prstGeom prst="rect">
+            <a:avLst/>
+          </a:prstGeom>
+        </p:spPr>
+      </p:pic>
     </p:spTree>
   </p:cSld>
   <p:clrMapOvr>
@@ -5746,7 +4944,7 @@
                 <a:ea typeface="IBM Plex Sans" pitchFamily="34" charset="-122"/>
                 <a:cs typeface="IBM Plex Sans" pitchFamily="34" charset="-120"/>
               </a:rPr>
-              <a:t>2,000+</a:t>
+              <a:t>none</a:t>
             </a:r>
             <a:endParaRPr lang="en-US" sz="4800" dirty="0"/>
           </a:p>
@@ -5790,7 +4988,7 @@
                 <a:ea typeface="IBM Plex Sans" pitchFamily="34" charset="-122"/>
                 <a:cs typeface="IBM Plex Sans" pitchFamily="34" charset="-120"/>
               </a:rPr>
-              <a:t>barrels of nails</a:t>
+              <a:t>doubles the ≥10 cm belt</a:t>
             </a:r>
             <a:endParaRPr lang="en-US" sz="1400" dirty="0"/>
           </a:p>
@@ -5868,7 +5066,7 @@
                 <a:ea typeface="IBM Plex Sans" pitchFamily="34" charset="-122"/>
                 <a:cs typeface="IBM Plex Sans" pitchFamily="34" charset="-120"/>
               </a:rPr>
-              <a:t>~2,000 </a:t>
+              <a:t>90–220</a:t>
             </a:r>
             <a:r>
               <a:rPr lang="en-US" sz="4800" b="1" dirty="0">
@@ -5879,7 +5077,7 @@
                 <a:ea typeface="IBM Plex Sans" pitchFamily="34" charset="-122"/>
                 <a:cs typeface="IBM Plex Sans" pitchFamily="34" charset="-120"/>
               </a:rPr>
-              <a:t>t</a:t>
+              <a:t/>
             </a:r>
             <a:endParaRPr lang="en-US" sz="4800" dirty="0"/>
           </a:p>
@@ -5923,7 +5121,7 @@
                 <a:ea typeface="IBM Plex Sans" pitchFamily="34" charset="-122"/>
                 <a:cs typeface="IBM Plex Sans" pitchFamily="34" charset="-120"/>
               </a:rPr>
-              <a:t>of steel, into one shell</a:t>
+              <a:t>barrels double the 1–10 cm field</a:t>
             </a:r>
             <a:endParaRPr lang="en-US" sz="1400" dirty="0"/>
           </a:p>
@@ -6001,7 +5199,7 @@
                 <a:ea typeface="IBM Plex Sans" pitchFamily="34" charset="-122"/>
                 <a:cs typeface="IBM Plex Sans" pitchFamily="34" charset="-120"/>
               </a:rPr>
-              <a:t>100+</a:t>
+              <a:t>≈ 25</a:t>
             </a:r>
             <a:endParaRPr lang="en-US" sz="4800" dirty="0"/>
           </a:p>
@@ -6045,7 +5243,7 @@
                 <a:ea typeface="IBM Plex Sans" pitchFamily="34" charset="-122"/>
                 <a:cs typeface="IBM Plex Sans" pitchFamily="34" charset="-120"/>
               </a:rPr>
-              <a:t>rocket launches, all nails</a:t>
+              <a:t>barrels ≈ one ASAT strike</a:t>
             </a:r>
             <a:endParaRPr lang="en-US" sz="1400" dirty="0"/>
           </a:p>
@@ -6089,7 +5287,7 @@
                 <a:ea typeface="IBM Plex Sans" pitchFamily="34" charset="-122"/>
                 <a:cs typeface="IBM Plex Sans" pitchFamily="34" charset="-120"/>
               </a:rPr>
-              <a:t>More than a year of humanity's </a:t>
+              <a:t>Barrels dumped at 900 km, over 50 years. Nails flood the lethal-but-untrackable 1–10 cm field but can't feed the ≥10 cm cascade (even 1,000 barrels add only +18%); the 90–220 range brackets how much debris small impacts throw off (breakup model as written vs NASA's LEGEND convention). Ordinary launch traffic tips the belt for free: 50 launches a year multiply it ×2.5.</a:t>
             </a:r>
             <a:r>
               <a:rPr lang="en-US" sz="1550" b="1" dirty="0">
@@ -6100,7 +5298,7 @@
                 <a:ea typeface="IBM Plex Sans" pitchFamily="34" charset="-122"/>
                 <a:cs typeface="IBM Plex Sans" pitchFamily="34" charset="-120"/>
               </a:rPr>
-              <a:t>entire</a:t>
+              <a:t/>
             </a:r>
             <a:r>
               <a:rPr lang="en-US" sz="1550" dirty="0">
@@ -6111,7 +5309,7 @@
                 <a:ea typeface="IBM Plex Sans" pitchFamily="34" charset="-122"/>
                 <a:cs typeface="IBM Plex Sans" pitchFamily="34" charset="-120"/>
               </a:rPr>
-              <a:t> launch mass, dedicated to dumping nails. By contrast, ordinary launch traffic tips a band for </a:t>
+              <a:t/>
             </a:r>
             <a:r>
               <a:rPr lang="en-US" sz="1550" dirty="0">
@@ -6122,7 +5320,7 @@
                 <a:ea typeface="IBM Plex Sans" pitchFamily="34" charset="-122"/>
                 <a:cs typeface="IBM Plex Sans" pitchFamily="34" charset="-120"/>
               </a:rPr>
-              <a:t>free</a:t>
+              <a:t/>
             </a:r>
             <a:r>
               <a:rPr lang="en-US" sz="1550" dirty="0">
@@ -6133,7 +5331,7 @@
                 <a:ea typeface="IBM Plex Sans" pitchFamily="34" charset="-122"/>
                 <a:cs typeface="IBM Plex Sans" pitchFamily="34" charset="-120"/>
               </a:rPr>
-              <a:t> — and one ASAT strike matches thousands of barrels from a single missile.</a:t>
+              <a:t/>
             </a:r>
             <a:endParaRPr lang="en-US" sz="1550" dirty="0"/>
           </a:p>
@@ -6332,208 +5530,9 @@
                 <a:ea typeface="IBM Plex Sans" pitchFamily="34" charset="-122"/>
                 <a:cs typeface="IBM Plex Sans" pitchFamily="34" charset="-120"/>
               </a:rPr>
-              <a:t>Debris in the 800–1000 km belt, 50 years</a:t>
+              <a:t>Objects ≥10 cm in the 700–1,100 km belt, 50 years</a:t>
             </a:r>
             <a:endParaRPr lang="en-US" sz="1300" dirty="0"/>
-          </a:p>
-        </p:txBody>
-      </p:sp>
-      <p:pic>
-        <p:nvPicPr>
-          <p:cNvPr id="6" name="Image 0" descr="Exponential debris runaway from 1 million to 66.7 million objects over 50 years"/>
-          <p:cNvPicPr>
-            <a:picLocks noChangeAspect="1"/>
-          </p:cNvPicPr>
-          <p:nvPr/>
-        </p:nvPicPr>
-        <p:blipFill>
-          <a:blip r:embed="rId3"/>
-          <a:srcRect l="-2778" r="-2778"/>
-          <a:stretch/>
-        </p:blipFill>
-        <p:spPr>
-          <a:xfrm>
-            <a:off x="1032933" y="1983718"/>
-            <a:ext cx="4572000" cy="2286000"/>
-          </a:xfrm>
-          <a:prstGeom prst="rect">
-            <a:avLst/>
-          </a:prstGeom>
-        </p:spPr>
-      </p:pic>
-      <p:sp>
-        <p:nvSpPr>
-          <p:cNvPr id="7" name="Text 4"/>
-          <p:cNvSpPr/>
-          <p:nvPr/>
-        </p:nvSpPr>
-        <p:spPr>
-          <a:xfrm>
-            <a:off x="1286933" y="4168118"/>
-            <a:ext cx="218480" cy="220927"/>
-          </a:xfrm>
-          <a:prstGeom prst="rect">
-            <a:avLst/>
-          </a:prstGeom>
-          <a:noFill/>
-          <a:ln/>
-        </p:spPr>
-        <p:txBody>
-          <a:bodyPr wrap="square" lIns="0" tIns="0" rIns="0" bIns="0" rtlCol="0" anchor="t">
-            <a:normAutofit/>
-          </a:bodyPr>
-          <a:lstStyle/>
-          <a:p>
-            <a:pPr marL="0" indent="0" algn="l">
-              <a:lnSpc>
-                <a:spcPts val="1540"/>
-              </a:lnSpc>
-              <a:buNone/>
-            </a:pPr>
-            <a:r>
-              <a:rPr lang="en-US" sz="1100" dirty="0">
-                <a:solidFill>
-                  <a:srgbClr val="9FB2CC"/>
-                </a:solidFill>
-                <a:latin typeface="IBM Plex Mono" pitchFamily="34" charset="0"/>
-                <a:ea typeface="IBM Plex Mono" pitchFamily="34" charset="-122"/>
-                <a:cs typeface="IBM Plex Mono" pitchFamily="34" charset="-120"/>
-              </a:rPr>
-              <a:t>1M</a:t>
-            </a:r>
-            <a:endParaRPr lang="en-US" sz="1100" dirty="0"/>
-          </a:p>
-        </p:txBody>
-      </p:sp>
-      <p:sp>
-        <p:nvSpPr>
-          <p:cNvPr id="8" name="Text 5"/>
-          <p:cNvSpPr/>
-          <p:nvPr/>
-        </p:nvSpPr>
-        <p:spPr>
-          <a:xfrm>
-            <a:off x="4588933" y="2136118"/>
-            <a:ext cx="546100" cy="256514"/>
-          </a:xfrm>
-          <a:prstGeom prst="rect">
-            <a:avLst/>
-          </a:prstGeom>
-          <a:noFill/>
-          <a:ln/>
-        </p:spPr>
-        <p:txBody>
-          <a:bodyPr wrap="square" lIns="0" tIns="0" rIns="0" bIns="0" rtlCol="0" anchor="t">
-            <a:normAutofit/>
-          </a:bodyPr>
-          <a:lstStyle/>
-          <a:p>
-            <a:pPr marL="0" indent="0" algn="l">
-              <a:lnSpc>
-                <a:spcPts val="1820"/>
-              </a:lnSpc>
-              <a:buNone/>
-            </a:pPr>
-            <a:r>
-              <a:rPr lang="en-US" sz="1300" dirty="0">
-                <a:solidFill>
-                  <a:srgbClr val="FF5A52"/>
-                </a:solidFill>
-                <a:latin typeface="IBM Plex Mono" pitchFamily="34" charset="0"/>
-                <a:ea typeface="IBM Plex Mono" pitchFamily="34" charset="-122"/>
-                <a:cs typeface="IBM Plex Mono" pitchFamily="34" charset="-120"/>
-              </a:rPr>
-              <a:t>66.7M</a:t>
-            </a:r>
-            <a:endParaRPr lang="en-US" sz="1300" dirty="0"/>
-          </a:p>
-        </p:txBody>
-      </p:sp>
-      <p:sp>
-        <p:nvSpPr>
-          <p:cNvPr id="9" name="Text 6"/>
-          <p:cNvSpPr/>
-          <p:nvPr/>
-        </p:nvSpPr>
-        <p:spPr>
-          <a:xfrm>
-            <a:off x="1540933" y="4307818"/>
-            <a:ext cx="134673" cy="220927"/>
-          </a:xfrm>
-          <a:prstGeom prst="rect">
-            <a:avLst/>
-          </a:prstGeom>
-          <a:noFill/>
-          <a:ln/>
-        </p:spPr>
-        <p:txBody>
-          <a:bodyPr wrap="square" lIns="0" tIns="0" rIns="0" bIns="0" rtlCol="0" anchor="t">
-            <a:normAutofit/>
-          </a:bodyPr>
-          <a:lstStyle/>
-          <a:p>
-            <a:pPr marL="0" indent="0" algn="l">
-              <a:lnSpc>
-                <a:spcPts val="1540"/>
-              </a:lnSpc>
-              <a:buNone/>
-            </a:pPr>
-            <a:r>
-              <a:rPr lang="en-US" sz="1100" dirty="0">
-                <a:solidFill>
-                  <a:srgbClr val="647A99"/>
-                </a:solidFill>
-                <a:latin typeface="IBM Plex Mono" pitchFamily="34" charset="0"/>
-                <a:ea typeface="IBM Plex Mono" pitchFamily="34" charset="-122"/>
-                <a:cs typeface="IBM Plex Mono" pitchFamily="34" charset="-120"/>
-              </a:rPr>
-              <a:t>0</a:t>
-            </a:r>
-            <a:endParaRPr lang="en-US" sz="1100" dirty="0"/>
-          </a:p>
-        </p:txBody>
-      </p:sp>
-      <p:sp>
-        <p:nvSpPr>
-          <p:cNvPr id="10" name="Text 7"/>
-          <p:cNvSpPr/>
-          <p:nvPr/>
-        </p:nvSpPr>
-        <p:spPr>
-          <a:xfrm>
-            <a:off x="5046133" y="4307818"/>
-            <a:ext cx="469900" cy="220927"/>
-          </a:xfrm>
-          <a:prstGeom prst="rect">
-            <a:avLst/>
-          </a:prstGeom>
-          <a:noFill/>
-          <a:ln/>
-        </p:spPr>
-        <p:txBody>
-          <a:bodyPr wrap="square" lIns="0" tIns="0" rIns="0" bIns="0" rtlCol="0" anchor="t">
-            <a:normAutofit/>
-          </a:bodyPr>
-          <a:lstStyle/>
-          <a:p>
-            <a:pPr marL="0" indent="0" algn="l">
-              <a:lnSpc>
-                <a:spcPts val="1540"/>
-              </a:lnSpc>
-              <a:buNone/>
-            </a:pPr>
-            <a:r>
-              <a:rPr lang="en-US" sz="1100" dirty="0">
-                <a:solidFill>
-                  <a:srgbClr val="647A99"/>
-                </a:solidFill>
-                <a:latin typeface="IBM Plex Mono" pitchFamily="34" charset="0"/>
-                <a:ea typeface="IBM Plex Mono" pitchFamily="34" charset="-122"/>
-                <a:cs typeface="IBM Plex Mono" pitchFamily="34" charset="-120"/>
-              </a:rPr>
-              <a:t>50 yr</a:t>
-            </a:r>
-            <a:endParaRPr lang="en-US" sz="1100" dirty="0"/>
           </a:p>
         </p:txBody>
       </p:sp>
@@ -6609,7 +5608,7 @@
                 <a:ea typeface="IBM Plex Sans" pitchFamily="34" charset="-122"/>
                 <a:cs typeface="IBM Plex Sans" pitchFamily="34" charset="-120"/>
               </a:rPr>
-              <a:t>~4,800 / yr</a:t>
+              <a:t>~1,600–1,700 / yr</a:t>
             </a:r>
             <a:endParaRPr lang="en-US" sz="2600" dirty="0"/>
           </a:p>
@@ -6731,7 +5730,7 @@
                 <a:ea typeface="IBM Plex Sans" pitchFamily="34" charset="-122"/>
                 <a:cs typeface="IBM Plex Sans" pitchFamily="34" charset="-120"/>
               </a:rPr>
-              <a:t>65×</a:t>
+              <a:t>×91</a:t>
             </a:r>
             <a:endParaRPr lang="en-US" sz="2600" dirty="0"/>
           </a:p>
@@ -6775,7 +5774,7 @@
                 <a:ea typeface="IBM Plex Sans" pitchFamily="34" charset="-122"/>
                 <a:cs typeface="IBM Plex Sans" pitchFamily="34" charset="-120"/>
               </a:rPr>
-              <a:t>debris growth — belt unusable for decades</a:t>
+              <a:t>growth in objects ≥10 cm (8k → 728k)</a:t>
             </a:r>
             <a:endParaRPr lang="en-US" sz="1200" dirty="0"/>
           </a:p>
@@ -6853,7 +5852,7 @@
                 <a:ea typeface="IBM Plex Sans" pitchFamily="34" charset="-122"/>
                 <a:cs typeface="IBM Plex Sans" pitchFamily="34" charset="-120"/>
               </a:rPr>
-              <a:t>Trigger:</a:t>
+              <a:t>Trigger: ~500 large objects a year into the belt for 50 years — mega-constellation scale, all in the wrong band.</a:t>
             </a:r>
             <a:r>
               <a:rPr lang="en-US" sz="1200" dirty="0">
@@ -6864,7 +5863,7 @@
                 <a:ea typeface="IBM Plex Sans" pitchFamily="34" charset="-122"/>
                 <a:cs typeface="IBM Plex Sans" pitchFamily="34" charset="-120"/>
               </a:rPr>
-              <a:t> ~2,000 </a:t>
+              <a:t/>
             </a:r>
             <a:r>
               <a:rPr lang="en-US" sz="1200" b="1" dirty="0">
@@ -6875,7 +5874,7 @@
                 <a:ea typeface="IBM Plex Sans" pitchFamily="34" charset="-122"/>
                 <a:cs typeface="IBM Plex Sans" pitchFamily="34" charset="-120"/>
               </a:rPr>
-              <a:t>large objects</a:t>
+              <a:t/>
             </a:r>
             <a:r>
               <a:rPr lang="en-US" sz="1200" dirty="0">
@@ -6886,7 +5885,7 @@
                 <a:ea typeface="IBM Plex Sans" pitchFamily="34" charset="-122"/>
                 <a:cs typeface="IBM Plex Sans" pitchFamily="34" charset="-120"/>
               </a:rPr>
-              <a:t> a year into the belt — mega-constellation scale, or a sustained ASAT campaign.</a:t>
+              <a:t/>
             </a:r>
             <a:endParaRPr lang="en-US" sz="1200" dirty="0"/>
           </a:p>
@@ -6930,7 +5929,7 @@
                 <a:ea typeface="IBM Plex Sans" pitchFamily="34" charset="-122"/>
                 <a:cs typeface="IBM Plex Sans" pitchFamily="34" charset="-120"/>
               </a:rPr>
-              <a:t>It takes </a:t>
+              <a:t>It takes mass and catastrophic energy — large objects, not nails. One ASAT strike on a 1 t satellite makes ~50,000 fragments ≥1 cm; the extreme is 500 intact objects a year piling into a band that already grows on its own. A nail has neither the mass nor the energy.</a:t>
             </a:r>
             <a:r>
               <a:rPr lang="en-US" sz="1400" b="1" dirty="0">
@@ -6941,7 +5940,7 @@
                 <a:ea typeface="IBM Plex Sans" pitchFamily="34" charset="-122"/>
                 <a:cs typeface="IBM Plex Sans" pitchFamily="34" charset="-120"/>
               </a:rPr>
-              <a:t>mass and catastrophic energy</a:t>
+              <a:t/>
             </a:r>
             <a:r>
               <a:rPr lang="en-US" sz="1400" dirty="0">
@@ -6952,7 +5951,7 @@
                 <a:ea typeface="IBM Plex Sans" pitchFamily="34" charset="-122"/>
                 <a:cs typeface="IBM Plex Sans" pitchFamily="34" charset="-120"/>
               </a:rPr>
-              <a:t> — large objects, not nails. One ASAT strike shatters a satellite into ~10⁴ fragments; the extreme is </a:t>
+              <a:t/>
             </a:r>
             <a:r>
               <a:rPr lang="en-US" sz="1400" i="1" dirty="0">
@@ -6963,7 +5962,7 @@
                 <a:ea typeface="IBM Plex Sans" pitchFamily="34" charset="-122"/>
                 <a:cs typeface="IBM Plex Sans" pitchFamily="34" charset="-120"/>
               </a:rPr>
-              <a:t>that, sustained for decades.</a:t>
+              <a:t/>
             </a:r>
             <a:r>
               <a:rPr lang="en-US" sz="1400" dirty="0">
@@ -6974,12 +5973,36 @@
                 <a:ea typeface="IBM Plex Sans" pitchFamily="34" charset="-122"/>
                 <a:cs typeface="IBM Plex Sans" pitchFamily="34" charset="-120"/>
               </a:rPr>
-              <a:t> A nail has neither the mass nor the energy.</a:t>
+              <a:t/>
             </a:r>
             <a:endParaRPr lang="en-US" sz="1400" dirty="0"/>
           </a:p>
         </p:txBody>
       </p:sp>
+      <p:pic>
+        <p:nvPicPr>
+          <p:cNvPr id="20" name="Picture 19" descr="deck_extreme.png"/>
+          <p:cNvPicPr>
+            <a:picLocks noChangeAspect="1"/>
+          </p:cNvPicPr>
+          <p:nvPr/>
+        </p:nvPicPr>
+        <p:blipFill>
+          <a:blip r:embed="rId5"/>
+          <a:stretch>
+            <a:fillRect/>
+          </a:stretch>
+        </p:blipFill>
+        <p:spPr>
+          <a:xfrm>
+            <a:off x="1033271" y="1984248"/>
+            <a:ext cx="5285232" cy="2286000"/>
+          </a:xfrm>
+          <a:prstGeom prst="rect">
+            <a:avLst/>
+          </a:prstGeom>
+        </p:spPr>
+      </p:pic>
     </p:spTree>
   </p:cSld>
   <p:clrMapOvr>
@@ -7083,16 +6106,51 @@
           </a:p>
         </p:txBody>
       </p:sp>
+      <p:sp>
+        <p:nvSpPr>
+          <p:cNvPr id="6" name="TextBox 5"/>
+          <p:cNvSpPr txBox="1"/>
+          <p:nvPr/>
+        </p:nvSpPr>
+        <p:spPr>
+          <a:xfrm>
+            <a:off x="502920" y="5989320"/>
+            <a:ext cx="11155680" cy="822960"/>
+          </a:xfrm>
+          <a:prstGeom prst="rect">
+            <a:avLst/>
+          </a:prstGeom>
+          <a:noFill/>
+        </p:spPr>
+        <p:txBody>
+          <a:bodyPr wrap="square" lIns="0" rIns="0">
+            <a:spAutoFit/>
+          </a:bodyPr>
+          <a:lstStyle/>
+          <a:p>
+            <a:pPr algn="l"/>
+            <a:r>
+              <a:rPr sz="1400" b="0">
+                <a:solidFill>
+                  <a:srgbClr val="9FB2CC"/>
+                </a:solidFill>
+                <a:latin typeface="Calibri"/>
+              </a:rPr>
+              <a:t>Sustained launch of 500 objects a year into the 700–1,100 km belt multiplies its ≥10 cm population ~91× in 50 years — the shell goes from sparse (left) to a near-opaque hazard band (right). Illustrative; densities not to scale.</a:t>
+            </a:r>
+          </a:p>
+        </p:txBody>
+      </p:sp>
       <p:pic>
         <p:nvPicPr>
-          <p:cNvPr id="4" name="Picture 3" descr="extreme1.png"/>
+          <p:cNvPr id="7" name="Picture 6" descr="extreme1.png"/>
           <p:cNvPicPr>
             <a:picLocks noChangeAspect="1"/>
           </p:cNvPicPr>
           <p:nvPr/>
         </p:nvPicPr>
         <p:blipFill>
-          <a:blip r:embed="rId2"/>
+          <a:blip r:embed="rId6"/>
           <a:stretch>
             <a:fillRect/>
           </a:stretch>
@@ -7109,14 +6167,14 @@
       </p:pic>
       <p:pic>
         <p:nvPicPr>
-          <p:cNvPr id="5" name="Picture 4" descr="extreme2.png"/>
+          <p:cNvPr id="8" name="Picture 7" descr="extreme2.png"/>
           <p:cNvPicPr>
             <a:picLocks noChangeAspect="1"/>
           </p:cNvPicPr>
           <p:nvPr/>
         </p:nvPicPr>
         <p:blipFill>
-          <a:blip r:embed="rId3"/>
+          <a:blip r:embed="rId7"/>
           <a:stretch>
             <a:fillRect/>
           </a:stretch>
@@ -7131,41 +6189,6 @@
           </a:prstGeom>
         </p:spPr>
       </p:pic>
-      <p:sp>
-        <p:nvSpPr>
-          <p:cNvPr id="6" name="TextBox 5"/>
-          <p:cNvSpPr txBox="1"/>
-          <p:nvPr/>
-        </p:nvSpPr>
-        <p:spPr>
-          <a:xfrm>
-            <a:off x="502920" y="5989320"/>
-            <a:ext cx="11155680" cy="822960"/>
-          </a:xfrm>
-          <a:prstGeom prst="rect">
-            <a:avLst/>
-          </a:prstGeom>
-          <a:noFill/>
-        </p:spPr>
-        <p:txBody>
-          <a:bodyPr wrap="square" lIns="0" rIns="0">
-            <a:spAutoFit/>
-          </a:bodyPr>
-          <a:lstStyle/>
-          <a:p>
-            <a:pPr algn="l"/>
-            <a:r>
-              <a:rPr sz="1400" b="0">
-                <a:solidFill>
-                  <a:srgbClr val="9FB2CC"/>
-                </a:solidFill>
-                <a:latin typeface="Calibri"/>
-              </a:rPr>
-              <a:t>Sustained launch into the 800–1000 km belt drives ~65× debris growth over 50 years — the shell goes from sparse (left) to a near-opaque hazard band (right). Illustrative; densities not to scale.</a:t>
-            </a:r>
-          </a:p>
-        </p:txBody>
-      </p:sp>
     </p:spTree>
   </p:cSld>
   <p:clrMapOvr>
@@ -7281,7 +6304,7 @@
                 <a:ea typeface="IBM Plex Sans" pitchFamily="34" charset="-122"/>
                 <a:cs typeface="IBM Plex Sans" pitchFamily="34" charset="-120"/>
               </a:rPr>
-              <a:t>Low and violent — but self-clearing</a:t>
+              <a:t>Low down, even a big breakup clears fast</a:t>
             </a:r>
             <a:endParaRPr lang="en-US" sz="2800" dirty="0"/>
           </a:p>
@@ -7359,340 +6382,9 @@
                 <a:ea typeface="IBM Plex Sans" pitchFamily="34" charset="-122"/>
                 <a:cs typeface="IBM Plex Sans" pitchFamily="34" charset="-120"/>
               </a:rPr>
-              <a:t>Collision hazard in a 500 km shell after a huge debris event</a:t>
+              <a:t>Extra collision risk at 475 km after a 2.2 t breakup (like Cosmos-1408)</a:t>
             </a:r>
             <a:endParaRPr lang="en-US" sz="1250" dirty="0"/>
-          </a:p>
-        </p:txBody>
-      </p:sp>
-      <p:pic>
-        <p:nvPicPr>
-          <p:cNvPr id="6" name="Image 0" descr="Hazard spikes then decays back to baseline within about two years"/>
-          <p:cNvPicPr>
-            <a:picLocks noChangeAspect="1"/>
-          </p:cNvPicPr>
-          <p:nvPr/>
-        </p:nvPicPr>
-        <p:blipFill>
-          <a:blip r:embed="rId3"/>
-          <a:srcRect/>
-          <a:stretch/>
-        </p:blipFill>
-        <p:spPr>
-          <a:xfrm>
-            <a:off x="1020233" y="1936353"/>
-            <a:ext cx="4445000" cy="2159000"/>
-          </a:xfrm>
-          <a:prstGeom prst="rect">
-            <a:avLst/>
-          </a:prstGeom>
-        </p:spPr>
-      </p:pic>
-      <p:sp>
-        <p:nvSpPr>
-          <p:cNvPr id="7" name="Text 4"/>
-          <p:cNvSpPr/>
-          <p:nvPr/>
-        </p:nvSpPr>
-        <p:spPr>
-          <a:xfrm>
-            <a:off x="1782233" y="2291953"/>
-            <a:ext cx="729324" cy="247650"/>
-          </a:xfrm>
-          <a:prstGeom prst="rect">
-            <a:avLst/>
-          </a:prstGeom>
-          <a:noFill/>
-          <a:ln/>
-        </p:spPr>
-        <p:txBody>
-          <a:bodyPr wrap="square" lIns="0" tIns="0" rIns="0" bIns="0" rtlCol="0" anchor="t">
-            <a:normAutofit/>
-          </a:bodyPr>
-          <a:lstStyle/>
-          <a:p>
-            <a:pPr marL="0" indent="0" algn="l">
-              <a:lnSpc>
-                <a:spcPts val="1750"/>
-              </a:lnSpc>
-              <a:buNone/>
-            </a:pPr>
-            <a:r>
-              <a:rPr lang="en-US" sz="1250" b="1" dirty="0">
-                <a:solidFill>
-                  <a:srgbClr val="FF9AA0"/>
-                </a:solidFill>
-                <a:latin typeface="IBM Plex Sans" pitchFamily="34" charset="0"/>
-                <a:ea typeface="IBM Plex Sans" pitchFamily="34" charset="-122"/>
-                <a:cs typeface="IBM Plex Sans" pitchFamily="34" charset="-120"/>
-              </a:rPr>
-              <a:t>unusable</a:t>
-            </a:r>
-            <a:endParaRPr lang="en-US" sz="1250" dirty="0"/>
-          </a:p>
-        </p:txBody>
-      </p:sp>
-      <p:sp>
-        <p:nvSpPr>
-          <p:cNvPr id="8" name="Text 5"/>
-          <p:cNvSpPr/>
-          <p:nvPr/>
-        </p:nvSpPr>
-        <p:spPr>
-          <a:xfrm>
-            <a:off x="3687233" y="2291953"/>
-            <a:ext cx="785614" cy="247650"/>
-          </a:xfrm>
-          <a:prstGeom prst="rect">
-            <a:avLst/>
-          </a:prstGeom>
-          <a:noFill/>
-          <a:ln/>
-        </p:spPr>
-        <p:txBody>
-          <a:bodyPr wrap="square" lIns="0" tIns="0" rIns="0" bIns="0" rtlCol="0" anchor="t">
-            <a:normAutofit/>
-          </a:bodyPr>
-          <a:lstStyle/>
-          <a:p>
-            <a:pPr marL="0" indent="0" algn="l">
-              <a:lnSpc>
-                <a:spcPts val="1750"/>
-              </a:lnSpc>
-              <a:buNone/>
-            </a:pPr>
-            <a:r>
-              <a:rPr lang="en-US" sz="1250" b="1" dirty="0">
-                <a:solidFill>
-                  <a:srgbClr val="7EE6B0"/>
-                </a:solidFill>
-                <a:latin typeface="IBM Plex Sans" pitchFamily="34" charset="0"/>
-                <a:ea typeface="IBM Plex Sans" pitchFamily="34" charset="-122"/>
-                <a:cs typeface="IBM Plex Sans" pitchFamily="34" charset="-120"/>
-              </a:rPr>
-              <a:t>recovered</a:t>
-            </a:r>
-            <a:endParaRPr lang="en-US" sz="1250" dirty="0"/>
-          </a:p>
-        </p:txBody>
-      </p:sp>
-      <p:sp>
-        <p:nvSpPr>
-          <p:cNvPr id="9" name="Text 6"/>
-          <p:cNvSpPr/>
-          <p:nvPr/>
-        </p:nvSpPr>
-        <p:spPr>
-          <a:xfrm>
-            <a:off x="969433" y="3028553"/>
-            <a:ext cx="533400" cy="185407"/>
-          </a:xfrm>
-          <a:prstGeom prst="rect">
-            <a:avLst/>
-          </a:prstGeom>
-          <a:noFill/>
-          <a:ln/>
-        </p:spPr>
-        <p:txBody>
-          <a:bodyPr wrap="square" lIns="0" tIns="0" rIns="0" bIns="0" rtlCol="0" anchor="t">
-            <a:normAutofit/>
-          </a:bodyPr>
-          <a:lstStyle/>
-          <a:p>
-            <a:pPr marL="0" indent="0" algn="r">
-              <a:lnSpc>
-                <a:spcPts val="1260"/>
-              </a:lnSpc>
-              <a:buNone/>
-            </a:pPr>
-            <a:r>
-              <a:rPr lang="en-US" sz="900" dirty="0">
-                <a:solidFill>
-                  <a:srgbClr val="9FB2CC"/>
-                </a:solidFill>
-                <a:latin typeface="IBM Plex Mono" pitchFamily="34" charset="0"/>
-                <a:ea typeface="IBM Plex Mono" pitchFamily="34" charset="-122"/>
-                <a:cs typeface="IBM Plex Mono" pitchFamily="34" charset="-120"/>
-              </a:rPr>
-              <a:t>no-go</a:t>
-            </a:r>
-            <a:endParaRPr lang="en-US" sz="900" dirty="0"/>
-          </a:p>
-        </p:txBody>
-      </p:sp>
-      <p:sp>
-        <p:nvSpPr>
-          <p:cNvPr id="10" name="Text 7"/>
-          <p:cNvSpPr/>
-          <p:nvPr/>
-        </p:nvSpPr>
-        <p:spPr>
-          <a:xfrm>
-            <a:off x="1490133" y="3879453"/>
-            <a:ext cx="127000" cy="203200"/>
-          </a:xfrm>
-          <a:prstGeom prst="rect">
-            <a:avLst/>
-          </a:prstGeom>
-          <a:noFill/>
-          <a:ln/>
-        </p:spPr>
-        <p:txBody>
-          <a:bodyPr wrap="square" lIns="0" tIns="0" rIns="0" bIns="0" rtlCol="0" anchor="t">
-            <a:normAutofit/>
-          </a:bodyPr>
-          <a:lstStyle/>
-          <a:p>
-            <a:pPr marL="0" indent="0" algn="l">
-              <a:lnSpc>
-                <a:spcPts val="1400"/>
-              </a:lnSpc>
-              <a:buNone/>
-            </a:pPr>
-            <a:r>
-              <a:rPr lang="en-US" sz="1000" dirty="0">
-                <a:solidFill>
-                  <a:srgbClr val="647A99"/>
-                </a:solidFill>
-                <a:latin typeface="IBM Plex Mono" pitchFamily="34" charset="0"/>
-                <a:ea typeface="IBM Plex Mono" pitchFamily="34" charset="-122"/>
-                <a:cs typeface="IBM Plex Mono" pitchFamily="34" charset="-120"/>
-              </a:rPr>
-              <a:t>0</a:t>
-            </a:r>
-            <a:endParaRPr lang="en-US" sz="1000" dirty="0"/>
-          </a:p>
-        </p:txBody>
-      </p:sp>
-      <p:sp>
-        <p:nvSpPr>
-          <p:cNvPr id="11" name="Text 8"/>
-          <p:cNvSpPr/>
-          <p:nvPr/>
-        </p:nvSpPr>
-        <p:spPr>
-          <a:xfrm>
-            <a:off x="2404533" y="3879453"/>
-            <a:ext cx="127000" cy="203200"/>
-          </a:xfrm>
-          <a:prstGeom prst="rect">
-            <a:avLst/>
-          </a:prstGeom>
-          <a:noFill/>
-          <a:ln/>
-        </p:spPr>
-        <p:txBody>
-          <a:bodyPr wrap="square" lIns="0" tIns="0" rIns="0" bIns="0" rtlCol="0" anchor="t">
-            <a:normAutofit/>
-          </a:bodyPr>
-          <a:lstStyle/>
-          <a:p>
-            <a:pPr marL="0" indent="0" algn="l">
-              <a:lnSpc>
-                <a:spcPts val="1400"/>
-              </a:lnSpc>
-              <a:buNone/>
-            </a:pPr>
-            <a:r>
-              <a:rPr lang="en-US" sz="1000" dirty="0">
-                <a:solidFill>
-                  <a:srgbClr val="647A99"/>
-                </a:solidFill>
-                <a:latin typeface="IBM Plex Mono" pitchFamily="34" charset="0"/>
-                <a:ea typeface="IBM Plex Mono" pitchFamily="34" charset="-122"/>
-                <a:cs typeface="IBM Plex Mono" pitchFamily="34" charset="-120"/>
-              </a:rPr>
-              <a:t>1</a:t>
-            </a:r>
-            <a:endParaRPr lang="en-US" sz="1000" dirty="0"/>
-          </a:p>
-        </p:txBody>
-      </p:sp>
-      <p:sp>
-        <p:nvSpPr>
-          <p:cNvPr id="12" name="Text 9"/>
-          <p:cNvSpPr/>
-          <p:nvPr/>
-        </p:nvSpPr>
-        <p:spPr>
-          <a:xfrm>
-            <a:off x="3318933" y="3879453"/>
-            <a:ext cx="127000" cy="203200"/>
-          </a:xfrm>
-          <a:prstGeom prst="rect">
-            <a:avLst/>
-          </a:prstGeom>
-          <a:noFill/>
-          <a:ln/>
-        </p:spPr>
-        <p:txBody>
-          <a:bodyPr wrap="square" lIns="0" tIns="0" rIns="0" bIns="0" rtlCol="0" anchor="t">
-            <a:normAutofit/>
-          </a:bodyPr>
-          <a:lstStyle/>
-          <a:p>
-            <a:pPr marL="0" indent="0" algn="l">
-              <a:lnSpc>
-                <a:spcPts val="1400"/>
-              </a:lnSpc>
-              <a:buNone/>
-            </a:pPr>
-            <a:r>
-              <a:rPr lang="en-US" sz="1000" dirty="0">
-                <a:solidFill>
-                  <a:srgbClr val="647A99"/>
-                </a:solidFill>
-                <a:latin typeface="IBM Plex Mono" pitchFamily="34" charset="0"/>
-                <a:ea typeface="IBM Plex Mono" pitchFamily="34" charset="-122"/>
-                <a:cs typeface="IBM Plex Mono" pitchFamily="34" charset="-120"/>
-              </a:rPr>
-              <a:t>2</a:t>
-            </a:r>
-            <a:endParaRPr lang="en-US" sz="1000" dirty="0"/>
-          </a:p>
-        </p:txBody>
-      </p:sp>
-      <p:sp>
-        <p:nvSpPr>
-          <p:cNvPr id="13" name="Text 10"/>
-          <p:cNvSpPr/>
-          <p:nvPr/>
-        </p:nvSpPr>
-        <p:spPr>
-          <a:xfrm>
-            <a:off x="4830233" y="3879453"/>
-            <a:ext cx="355600" cy="203200"/>
-          </a:xfrm>
-          <a:prstGeom prst="rect">
-            <a:avLst/>
-          </a:prstGeom>
-          <a:noFill/>
-          <a:ln/>
-        </p:spPr>
-        <p:txBody>
-          <a:bodyPr wrap="square" lIns="0" tIns="0" rIns="0" bIns="0" rtlCol="0" anchor="t">
-            <a:normAutofit/>
-          </a:bodyPr>
-          <a:lstStyle/>
-          <a:p>
-            <a:pPr marL="0" indent="0" algn="l">
-              <a:lnSpc>
-                <a:spcPts val="1400"/>
-              </a:lnSpc>
-              <a:buNone/>
-            </a:pPr>
-            <a:r>
-              <a:rPr lang="en-US" sz="1000" dirty="0">
-                <a:solidFill>
-                  <a:srgbClr val="647A99"/>
-                </a:solidFill>
-                <a:latin typeface="IBM Plex Mono" pitchFamily="34" charset="0"/>
-                <a:ea typeface="IBM Plex Mono" pitchFamily="34" charset="-122"/>
-                <a:cs typeface="IBM Plex Mono" pitchFamily="34" charset="-120"/>
-              </a:rPr>
-              <a:t>4 yr</a:t>
-            </a:r>
-            <a:endParaRPr lang="en-US" sz="1000" dirty="0"/>
           </a:p>
         </p:txBody>
       </p:sp>
@@ -7768,7 +6460,7 @@
                 <a:ea typeface="IBM Plex Sans" pitchFamily="34" charset="-122"/>
                 <a:cs typeface="IBM Plex Sans" pitchFamily="34" charset="-120"/>
               </a:rPr>
-              <a:t>~98,000 / yr</a:t>
+              <a:t>+22%</a:t>
             </a:r>
             <a:endParaRPr lang="en-US" sz="2500" dirty="0"/>
           </a:p>
@@ -7812,7 +6504,7 @@
                 <a:ea typeface="IBM Plex Sans" pitchFamily="34" charset="-122"/>
                 <a:cs typeface="IBM Plex Sans" pitchFamily="34" charset="-120"/>
               </a:rPr>
-              <a:t>mission-kills at peak — a total no-go zone</a:t>
+              <a:t>local collision risk at the peak — not a no-go zone</a:t>
             </a:r>
             <a:endParaRPr lang="en-US" sz="1200" dirty="0"/>
           </a:p>
@@ -7890,7 +6582,7 @@
                 <a:ea typeface="IBM Plex Sans" pitchFamily="34" charset="-122"/>
                 <a:cs typeface="IBM Plex Sans" pitchFamily="34" charset="-120"/>
               </a:rPr>
-              <a:t>~0.5–2 yr</a:t>
+              <a:t>~1 yr</a:t>
             </a:r>
             <a:endParaRPr lang="en-US" sz="2500" dirty="0"/>
           </a:p>
@@ -7934,7 +6626,7 @@
                 <a:ea typeface="IBM Plex Sans" pitchFamily="34" charset="-122"/>
                 <a:cs typeface="IBM Plex Sans" pitchFamily="34" charset="-120"/>
               </a:rPr>
-              <a:t>for drag to sweep it clean at 500 km</a:t>
+              <a:t>for drag to sweep it clean</a:t>
             </a:r>
             <a:endParaRPr lang="en-US" sz="1200" dirty="0"/>
           </a:p>
@@ -8095,6 +6787,30 @@
           </a:p>
         </p:txBody>
       </p:sp>
+      <p:pic>
+        <p:nvPicPr>
+          <p:cNvPr id="23" name="Picture 22" descr="deck_lowevent.png"/>
+          <p:cNvPicPr>
+            <a:picLocks noChangeAspect="1"/>
+          </p:cNvPicPr>
+          <p:nvPr/>
+        </p:nvPicPr>
+        <p:blipFill>
+          <a:blip r:embed="rId5"/>
+          <a:stretch>
+            <a:fillRect/>
+          </a:stretch>
+        </p:blipFill>
+        <p:spPr>
+          <a:xfrm>
+            <a:off x="1024128" y="1938528"/>
+            <a:ext cx="5294376" cy="2157984"/>
+          </a:xfrm>
+          <a:prstGeom prst="rect">
+            <a:avLst/>
+          </a:prstGeom>
+        </p:spPr>
+      </p:pic>
     </p:spTree>
   </p:cSld>
   <p:clrMapOvr>
@@ -8288,7 +7004,7 @@
                 <a:ea typeface="IBM Plex Sans" pitchFamily="34" charset="-122"/>
                 <a:cs typeface="IBM Plex Sans" pitchFamily="34" charset="-120"/>
               </a:rPr>
-              <a:t>15,222</a:t>
+              <a:t>28,676</a:t>
             </a:r>
             <a:endParaRPr lang="en-US" sz="3000" dirty="0"/>
           </a:p>
@@ -8410,7 +7126,7 @@
                 <a:ea typeface="IBM Plex Sans" pitchFamily="34" charset="-122"/>
                 <a:cs typeface="IBM Plex Sans" pitchFamily="34" charset="-120"/>
               </a:rPr>
-              <a:t>70,676</a:t>
+              <a:t>9,911</a:t>
             </a:r>
             <a:endParaRPr lang="en-US" sz="3000" dirty="0"/>
           </a:p>
@@ -8454,7 +7170,7 @@
                 <a:ea typeface="IBM Plex Sans" pitchFamily="34" charset="-122"/>
                 <a:cs typeface="IBM Plex Sans" pitchFamily="34" charset="-120"/>
               </a:rPr>
-              <a:t>SATCAT records · 100% RCS</a:t>
+              <a:t>catalogued debris pieces (+1,552 rocket bodies)</a:t>
             </a:r>
             <a:endParaRPr lang="en-US" sz="1200" dirty="0"/>
           </a:p>
@@ -8532,7 +7248,7 @@
                 <a:ea typeface="IBM Plex Sans" pitchFamily="34" charset="-122"/>
                 <a:cs typeface="IBM Plex Sans" pitchFamily="34" charset="-120"/>
               </a:rPr>
-              <a:t>519 </a:t>
+              <a:t>510 kg</a:t>
             </a:r>
             <a:r>
               <a:rPr lang="en-US" sz="3000" b="1" dirty="0">
@@ -8543,7 +7259,7 @@
                 <a:ea typeface="IBM Plex Sans" pitchFamily="34" charset="-122"/>
                 <a:cs typeface="IBM Plex Sans" pitchFamily="34" charset="-120"/>
               </a:rPr>
-              <a:t>kg</a:t>
+              <a:t/>
             </a:r>
             <a:endParaRPr lang="en-US" sz="3000" dirty="0"/>
           </a:p>
@@ -8587,7 +7303,7 @@
                 <a:ea typeface="IBM Plex Sans" pitchFamily="34" charset="-122"/>
                 <a:cs typeface="IBM Plex Sans" pitchFamily="34" charset="-120"/>
               </a:rPr>
-              <a:t>mean mass (RCS-derived)</a:t>
+              <a:t>mean payload mass</a:t>
             </a:r>
             <a:endParaRPr lang="en-US" sz="1200" dirty="0"/>
           </a:p>
@@ -8665,7 +7381,7 @@
                 <a:ea typeface="IBM Plex Sans" pitchFamily="34" charset="-122"/>
                 <a:cs typeface="IBM Plex Sans" pitchFamily="34" charset="-120"/>
               </a:rPr>
-              <a:t>4.5 </a:t>
+              <a:t>4.4 m²</a:t>
             </a:r>
             <a:r>
               <a:rPr lang="en-US" sz="3000" b="1" dirty="0">
@@ -8676,7 +7392,7 @@
                 <a:ea typeface="IBM Plex Sans" pitchFamily="34" charset="-122"/>
                 <a:cs typeface="IBM Plex Sans" pitchFamily="34" charset="-120"/>
               </a:rPr>
-              <a:t>m²</a:t>
+              <a:t/>
             </a:r>
             <a:endParaRPr lang="en-US" sz="3000" dirty="0"/>
           </a:p>
@@ -8720,7 +7436,7 @@
                 <a:ea typeface="IBM Plex Sans" pitchFamily="34" charset="-122"/>
                 <a:cs typeface="IBM Plex Sans" pitchFamily="34" charset="-120"/>
               </a:rPr>
-              <a:t>mean cross-section</a:t>
+              <a:t>mean payload cross-section</a:t>
             </a:r>
             <a:endParaRPr lang="en-US" sz="1200" dirty="0"/>
           </a:p>
@@ -10830,7 +9546,7 @@
                 <a:ea typeface="IBM Plex Sans" pitchFamily="34" charset="-122"/>
                 <a:cs typeface="IBM Plex Sans" pitchFamily="34" charset="-120"/>
               </a:rPr>
-              <a:t>The debris belt is already near-critical. Launch and removal policy decide its fate — and against that, a barrel of nails is a rounding error.</a:t>
+              <a:t>The 700–1,100 km belt already grows on its own. Launch and removal policy decide its fate — and against that, a barrel of nails is a rounding error.</a:t>
             </a:r>
             <a:endParaRPr lang="en-US" sz="1900" dirty="0"/>
           </a:p>
@@ -10951,7 +9667,7 @@
                 <a:ea typeface="IBM Plex Sans" pitchFamily="34" charset="-122"/>
                 <a:cs typeface="IBM Plex Sans" pitchFamily="34" charset="-120"/>
               </a:rPr>
-              <a:t>What the calibration tells us</a:t>
+              <a:t>What the model can and can't say</a:t>
             </a:r>
             <a:endParaRPr lang="en-US" sz="3000" dirty="0"/>
           </a:p>
@@ -11052,7 +9768,7 @@
                 <a:ea typeface="IBM Plex Sans" pitchFamily="34" charset="-122"/>
                 <a:cs typeface="IBM Plex Sans" pitchFamily="34" charset="-120"/>
               </a:rPr>
-              <a:t>Box model is conservative</a:t>
+              <a:t>Three engines, one direction</a:t>
             </a:r>
             <a:endParaRPr lang="en-US" sz="1500" dirty="0"/>
           </a:p>
@@ -11096,7 +9812,7 @@
                 <a:ea typeface="IBM Plex Sans" pitchFamily="34" charset="-122"/>
                 <a:cs typeface="IBM Plex Sans" pitchFamily="34" charset="-120"/>
               </a:rPr>
-              <a:t>It </a:t>
+              <a:t>With no launches the belt's ≥10 cm population grows in all three: box ×1.13, discrete ×1.11, cube ×1.25 (8-seed means; single runs ×0.8–×1.5).</a:t>
             </a:r>
             <a:r>
               <a:rPr lang="en-US" sz="1300" b="1" dirty="0">
@@ -11107,7 +9823,7 @@
                 <a:ea typeface="IBM Plex Sans" pitchFamily="34" charset="-122"/>
                 <a:cs typeface="IBM Plex Sans" pitchFamily="34" charset="-120"/>
               </a:rPr>
-              <a:t>under</a:t>
+              <a:t/>
             </a:r>
             <a:r>
               <a:rPr lang="en-US" sz="1300" dirty="0">
@@ -11118,7 +9834,7 @@
                 <a:ea typeface="IBM Plex Sans" pitchFamily="34" charset="-122"/>
                 <a:cs typeface="IBM Plex Sans" pitchFamily="34" charset="-120"/>
               </a:rPr>
-              <a:t>counts collisions ~7× (it dilutes objects over the full sphere; real orbits concentrate in latitude bands). The true belt is, if anything, more collisional.</a:t>
+              <a:t/>
             </a:r>
             <a:endParaRPr lang="en-US" sz="1300" dirty="0"/>
           </a:p>
@@ -11219,7 +9935,7 @@
                 <a:ea typeface="IBM Plex Sans" pitchFamily="34" charset="-122"/>
                 <a:cs typeface="IBM Plex Sans" pitchFamily="34" charset="-120"/>
               </a:rPr>
-              <a:t>Conjunction: geometry over rate</a:t>
+              <a:t>Main uncertainty: small impacts</a:t>
             </a:r>
             <a:endParaRPr lang="en-US" sz="1500" dirty="0"/>
           </a:p>
@@ -11263,7 +9979,7 @@
                 <a:ea typeface="IBM Plex Sans" pitchFamily="34" charset="-122"/>
                 <a:cs typeface="IBM Plex Sans" pitchFamily="34" charset="-120"/>
               </a:rPr>
-              <a:t>Real orbit-crossing geometry is faithful (cross-shell impacts included); its </a:t>
+              <a:t>Whether small fragments' cratering throws off new debris changes 1–10 cm results 2–3× (breakup model as written vs NASA's LEGEND convention) — it barely moves the ≥10 cm belt.</a:t>
             </a:r>
             <a:r>
               <a:rPr lang="en-US" sz="1300" b="1" dirty="0">
@@ -11274,7 +9990,7 @@
                 <a:ea typeface="IBM Plex Sans" pitchFamily="34" charset="-122"/>
                 <a:cs typeface="IBM Plex Sans" pitchFamily="34" charset="-120"/>
               </a:rPr>
-              <a:t>absolute</a:t>
+              <a:t/>
             </a:r>
             <a:r>
               <a:rPr lang="en-US" sz="1300" dirty="0">
@@ -11285,7 +10001,7 @@
                 <a:ea typeface="IBM Plex Sans" pitchFamily="34" charset="-122"/>
                 <a:cs typeface="IBM Plex Sans" pitchFamily="34" charset="-120"/>
               </a:rPr>
-              <a:t> rate is qualitative pending finer particle resolution.</a:t>
+              <a:t/>
             </a:r>
             <a:endParaRPr lang="en-US" sz="1300" dirty="0"/>
           </a:p>
@@ -11386,7 +10102,7 @@
                 <a:ea typeface="IBM Plex Sans" pitchFamily="34" charset="-122"/>
                 <a:cs typeface="IBM Plex Sans" pitchFamily="34" charset="-120"/>
               </a:rPr>
-              <a:t>Three engines agree</a:t>
+              <a:t>Not modelled</a:t>
             </a:r>
             <a:endParaRPr lang="en-US" sz="1500" dirty="0"/>
           </a:p>
@@ -11430,7 +10146,7 @@
                 <a:ea typeface="IBM Plex Sans" pitchFamily="34" charset="-122"/>
                 <a:cs typeface="IBM Plex Sans" pitchFamily="34" charset="-120"/>
               </a:rPr>
-              <a:t>Box, discrete, and conjunction all bracket the same </a:t>
+              <a:t>Explosions and other non-collision debris sources, station-keeping and avoidance, the solar cycle. 28,676 real LEO objects; results are order-of-magnitude, not forecasts.</a:t>
             </a:r>
             <a:r>
               <a:rPr lang="en-US" sz="1300" b="1" dirty="0">
@@ -11441,7 +10157,7 @@
                 <a:ea typeface="IBM Plex Sans" pitchFamily="34" charset="-122"/>
                 <a:cs typeface="IBM Plex Sans" pitchFamily="34" charset="-120"/>
               </a:rPr>
-              <a:t>near-critical margin</a:t>
+              <a:t/>
             </a:r>
             <a:r>
               <a:rPr lang="en-US" sz="1300" dirty="0">
@@ -11452,7 +10168,7 @@
                 <a:ea typeface="IBM Plex Sans" pitchFamily="34" charset="-122"/>
                 <a:cs typeface="IBM Plex Sans" pitchFamily="34" charset="-120"/>
               </a:rPr>
-              <a:t> — and all agree the barrel is negligible.</a:t>
+              <a:t/>
             </a:r>
             <a:endParaRPr lang="en-US" sz="1300" dirty="0"/>
           </a:p>
@@ -11717,7 +10433,7 @@
                 <a:ea typeface="IBM Plex Sans" pitchFamily="34" charset="-122"/>
                 <a:cs typeface="IBM Plex Sans" pitchFamily="34" charset="-120"/>
               </a:rPr>
-              <a:t>CelesTrak — GP / TLE catalog &amp; SATCAT</a:t>
+              <a:t>Space-Track.org — full on-orbit GP catalog &amp; SATCAT (RCS)</a:t>
             </a:r>
             <a:endParaRPr lang="en-US" sz="1200" dirty="0"/>
           </a:p>
@@ -11738,7 +10454,7 @@
                 <a:ea typeface="IBM Plex Sans" pitchFamily="34" charset="-122"/>
                 <a:cs typeface="IBM Plex Sans" pitchFamily="34" charset="-120"/>
               </a:rPr>
-              <a:t>Space-Track.org — SATCAT with RCS</a:t>
+              <a:t>CelesTrak — GP / TLE catalog &amp; SATCAT</a:t>
             </a:r>
             <a:endParaRPr lang="en-US" sz="1200" dirty="0"/>
           </a:p>
@@ -11969,78 +10685,10 @@
                 <a:ea typeface="IBM Plex Sans" pitchFamily="34" charset="-122"/>
                 <a:cs typeface="IBM Plex Sans" pitchFamily="34" charset="-120"/>
               </a:rPr>
-              <a:t>Kessler (1978 — the debris belt</a:t>
+              <a:t>Kessler &amp; Cour-Palais (1978), J. Geophys. Res. — the debris belt</a:t>
             </a:r>
             <a:endParaRPr lang="en-US" sz="1200" dirty="0"/>
           </a:p>
-        </p:txBody>
-      </p:sp>
-      <p:sp>
-        <p:nvSpPr>
-          <p:cNvPr id="10" name="Text 8"/>
-          <p:cNvSpPr/>
-          <p:nvPr/>
-        </p:nvSpPr>
-        <p:spPr>
-          <a:xfrm>
-            <a:off x="6096000" y="2297708"/>
-            <a:ext cx="5441696" cy="231114"/>
-          </a:xfrm>
-          <a:prstGeom prst="rect">
-            <a:avLst/>
-          </a:prstGeom>
-          <a:noFill/>
-          <a:ln/>
-        </p:spPr>
-        <p:txBody>
-          <a:bodyPr wrap="square" lIns="0" tIns="0" rIns="0" bIns="0" rtlCol="0" anchor="t">
-            <a:normAutofit/>
-          </a:bodyPr>
-          <a:lstStyle/>
-          <a:p>
-            <a:pPr marL="0" indent="0" algn="l">
-              <a:lnSpc>
-                <a:spcPts val="1620"/>
-              </a:lnSpc>
-              <a:buNone/>
-            </a:pPr>
-            <a:r>
-              <a:rPr lang="en-US" sz="1350" b="1" dirty="0">
-                <a:solidFill>
-                  <a:srgbClr val="FF8C42"/>
-                </a:solidFill>
-                <a:latin typeface="IBM Plex Sans" pitchFamily="34" charset="0"/>
-                <a:ea typeface="IBM Plex Sans" pitchFamily="34" charset="-122"/>
-                <a:cs typeface="IBM Plex Sans" pitchFamily="34" charset="-120"/>
-              </a:rPr>
-              <a:t>Events &amp; policy</a:t>
-            </a:r>
-            <a:endParaRPr lang="en-US" sz="1350" dirty="0"/>
-          </a:p>
-        </p:txBody>
-      </p:sp>
-      <p:sp>
-        <p:nvSpPr>
-          <p:cNvPr id="11" name="Text 9"/>
-          <p:cNvSpPr/>
-          <p:nvPr/>
-        </p:nvSpPr>
-        <p:spPr>
-          <a:xfrm>
-            <a:off x="6096000" y="2566925"/>
-            <a:ext cx="5441696" cy="665361"/>
-          </a:xfrm>
-          <a:prstGeom prst="rect">
-            <a:avLst/>
-          </a:prstGeom>
-          <a:noFill/>
-          <a:ln/>
-        </p:spPr>
-        <p:txBody>
-          <a:bodyPr wrap="square" lIns="0" tIns="0" rIns="0" bIns="0" rtlCol="0" anchor="t">
-            <a:normAutofit/>
-          </a:bodyPr>
-          <a:lstStyle/>
           <a:p>
             <a:pPr marL="182880" indent="-155194" algn="l">
               <a:lnSpc>
@@ -12058,10 +10706,78 @@
                 <a:ea typeface="IBM Plex Sans" pitchFamily="34" charset="-122"/>
                 <a:cs typeface="IBM Plex Sans" pitchFamily="34" charset="-120"/>
               </a:rPr>
-              <a:t>Fengyun-1C (2007), Cosmos–Iridium (2009), Cosmos-1408 (2021)</a:t>
+              <a:t>Liou &amp; Johnson (2006), Science — growth without launches</a:t>
             </a:r>
             <a:endParaRPr lang="en-US" sz="1200" dirty="0"/>
           </a:p>
+        </p:txBody>
+      </p:sp>
+      <p:sp>
+        <p:nvSpPr>
+          <p:cNvPr id="10" name="Text 8"/>
+          <p:cNvSpPr/>
+          <p:nvPr/>
+        </p:nvSpPr>
+        <p:spPr>
+          <a:xfrm>
+            <a:off x="6096000" y="2297708"/>
+            <a:ext cx="5441696" cy="231114"/>
+          </a:xfrm>
+          <a:prstGeom prst="rect">
+            <a:avLst/>
+          </a:prstGeom>
+          <a:noFill/>
+          <a:ln/>
+        </p:spPr>
+        <p:txBody>
+          <a:bodyPr wrap="square" lIns="0" tIns="0" rIns="0" bIns="0" rtlCol="0" anchor="t">
+            <a:normAutofit/>
+          </a:bodyPr>
+          <a:lstStyle/>
+          <a:p>
+            <a:pPr marL="0" indent="0" algn="l">
+              <a:lnSpc>
+                <a:spcPts val="1620"/>
+              </a:lnSpc>
+              <a:buNone/>
+            </a:pPr>
+            <a:r>
+              <a:rPr lang="en-US" sz="1350" b="1" dirty="0">
+                <a:solidFill>
+                  <a:srgbClr val="FF8C42"/>
+                </a:solidFill>
+                <a:latin typeface="IBM Plex Sans" pitchFamily="34" charset="0"/>
+                <a:ea typeface="IBM Plex Sans" pitchFamily="34" charset="-122"/>
+                <a:cs typeface="IBM Plex Sans" pitchFamily="34" charset="-120"/>
+              </a:rPr>
+              <a:t>Events &amp; policy</a:t>
+            </a:r>
+            <a:endParaRPr lang="en-US" sz="1350" dirty="0"/>
+          </a:p>
+        </p:txBody>
+      </p:sp>
+      <p:sp>
+        <p:nvSpPr>
+          <p:cNvPr id="11" name="Text 9"/>
+          <p:cNvSpPr/>
+          <p:nvPr/>
+        </p:nvSpPr>
+        <p:spPr>
+          <a:xfrm>
+            <a:off x="6096000" y="2566925"/>
+            <a:ext cx="5441696" cy="665361"/>
+          </a:xfrm>
+          <a:prstGeom prst="rect">
+            <a:avLst/>
+          </a:prstGeom>
+          <a:noFill/>
+          <a:ln/>
+        </p:spPr>
+        <p:txBody>
+          <a:bodyPr wrap="square" lIns="0" tIns="0" rIns="0" bIns="0" rtlCol="0" anchor="t">
+            <a:normAutofit/>
+          </a:bodyPr>
+          <a:lstStyle/>
           <a:p>
             <a:pPr marL="182880" indent="-155194" algn="l">
               <a:lnSpc>
@@ -12079,6 +10795,27 @@
                 <a:ea typeface="IBM Plex Sans" pitchFamily="34" charset="-122"/>
                 <a:cs typeface="IBM Plex Sans" pitchFamily="34" charset="-120"/>
               </a:rPr>
+              <a:t>Fengyun-1C (2007), Cosmos–Iridium (2009), Cosmos-1408 (2021)</a:t>
+            </a:r>
+            <a:endParaRPr lang="en-US" sz="1200" dirty="0"/>
+          </a:p>
+          <a:p>
+            <a:pPr marL="182880" indent="-155194" algn="l">
+              <a:lnSpc>
+                <a:spcPts val="1680"/>
+              </a:lnSpc>
+              <a:buSzPct val="100000"/>
+              <a:buChar char="•"/>
+            </a:pPr>
+            <a:r>
+              <a:rPr lang="en-US" sz="1200" dirty="0">
+                <a:solidFill>
+                  <a:srgbClr val="9FB2CC"/>
+                </a:solidFill>
+                <a:latin typeface="IBM Plex Sans" pitchFamily="34" charset="0"/>
+                <a:ea typeface="IBM Plex Sans" pitchFamily="34" charset="-122"/>
+                <a:cs typeface="IBM Plex Sans" pitchFamily="34" charset="-120"/>
+              </a:rPr>
               <a:t>Outer Space Treaty (1967); PAROS / PPWT</a:t>
             </a:r>
             <a:endParaRPr lang="en-US" sz="1200" dirty="0"/>
@@ -12123,7 +10860,7 @@
                 <a:ea typeface="IBM Plex Mono" pitchFamily="34" charset="-122"/>
                 <a:cs typeface="IBM Plex Mono" pitchFamily="34" charset="-120"/>
               </a:rPr>
-              <a:t>Figures are outputs of the SpaceWars model, run on the live catalog on an RTX 5090 / CUDA. Values are order-of-magnitude estimates from a stylised model — not operational predictions.</a:t>
+              <a:t>Charts are SpaceWars model outputs (data/deck_numbers.json, CLI --deck) on the live Space-Track catalog; orbit visualizations are illustrative. Values are order-of-magnitude estimates from a stylised model — not operational predictions.</a:t>
             </a:r>
             <a:endParaRPr lang="en-US" sz="1150" dirty="0"/>
           </a:p>
@@ -15073,7 +13810,7 @@
                 <a:ea typeface="IBM Plex Sans" pitchFamily="34" charset="-122"/>
                 <a:cs typeface="IBM Plex Sans" pitchFamily="34" charset="-120"/>
               </a:rPr>
-              <a:t>One barrel never triggers a runaway cascade. Drag cleans it up, and the numbers fall orders of magnitude short.</a:t>
+              <a:t>One barrel never triggers a runaway. Low down, drag clears it in a couple of years; at 900 km, no number of barrels doubles the ≥10 cm belt.</a:t>
             </a:r>
             <a:endParaRPr lang="en-US" sz="1500" dirty="0"/>
           </a:p>
@@ -19382,7 +18119,7 @@
                           <a:ea typeface="IBM Plex Sans" pitchFamily="34" charset="-122"/>
                           <a:cs typeface="IBM Plex Sans" pitchFamily="34" charset="-120"/>
                         </a:rPr>
-                        <a:t>~17,000 frags &gt; 1 cm</a:t>
+                        <a:t>~29,000 frags</a:t>
                       </a:r>
                       <a:endParaRPr lang="en-US" sz="1350" dirty="0">
                         <a:latin typeface="IBM Plex Sans" charset="0"/>
